--- a/docs/report/NakhonSawanFlood_ลูกค้าและหน่วยงานราชการ.pptx
+++ b/docs/report/NakhonSawanFlood_ลูกค้าและหน่วยงานราชการ.pptx
@@ -11,6 +11,7 @@
     <p:sldId id="259" r:id="rId5"/>
     <p:sldId id="260" r:id="rId6"/>
     <p:sldId id="261" r:id="rId7"/>
+    <p:sldId id="268" r:id="rId19"/>
     <p:sldId id="262" r:id="rId8"/>
     <p:sldId id="263" r:id="rId9"/>
     <p:sldId id="264" r:id="rId10"/>
@@ -3945,6 +3946,10 @@
             <a:prstDash val="solid"/>
           </a:ln>
         </p:spPr>
+        <p:txBody>
+          <a:bodyPr/>
+          <a:p/>
+        </p:txBody>
       </p:sp>
       <p:sp>
         <p:nvSpPr>
@@ -3970,6 +3975,10 @@
             <a:prstDash val="solid"/>
           </a:ln>
         </p:spPr>
+        <p:txBody>
+          <a:bodyPr/>
+          <a:p/>
+        </p:txBody>
       </p:sp>
       <p:sp>
         <p:nvSpPr>
@@ -4120,6 +4129,10 @@
             <a:prstDash val="solid"/>
           </a:ln>
         </p:spPr>
+        <p:txBody>
+          <a:bodyPr/>
+          <a:p/>
+        </p:txBody>
       </p:sp>
       <p:sp>
         <p:nvSpPr>
@@ -4145,6 +4158,10 @@
             <a:prstDash val="solid"/>
           </a:ln>
         </p:spPr>
+        <p:txBody>
+          <a:bodyPr/>
+          <a:p/>
+        </p:txBody>
       </p:sp>
       <p:sp>
         <p:nvSpPr>
@@ -4218,7 +4235,7 @@
                 <a:ea typeface="Prompt" pitchFamily="34" charset="-122"/>
                 <a:cs typeface="Prompt" pitchFamily="34" charset="-120"/>
               </a:rPr>
-              <a:t>ต้องยืนยันกับข้อมูลจริง</a:t>
+              <a:t>ยืนยันกับข้อมูลจริงต่อเนื่อง</a:t>
             </a:r>
             <a:endParaRPr lang="en-US" sz="1600" dirty="0"/>
           </a:p>
@@ -4263,7 +4280,7 @@
                 <a:ea typeface="Prompt" pitchFamily="34" charset="-122"/>
                 <a:cs typeface="Prompt" pitchFamily="34" charset="-120"/>
               </a:rPr>
-              <a:t>ยังไม่ได้เทียบกับภาพดาวเทียม GISTDA และรายงานภาคสนาม</a:t>
+              <a:t>แอ่งท่าตะโกเทียบดาวเทียมแล้ว (CSI ~0.5) · พื้นที่อื่นสะสมภาพต่อ และควรมีรายงานภาคสนาม</a:t>
             </a:r>
             <a:endParaRPr lang="en-US" sz="1450" dirty="0"/>
           </a:p>
@@ -5153,6 +5170,10 @@
             <a:prstDash val="solid"/>
           </a:ln>
         </p:spPr>
+        <p:txBody>
+          <a:bodyPr/>
+          <a:p/>
+        </p:txBody>
       </p:sp>
       <p:sp>
         <p:nvSpPr>
@@ -5178,6 +5199,10 @@
             <a:prstDash val="solid"/>
           </a:ln>
         </p:spPr>
+        <p:txBody>
+          <a:bodyPr/>
+          <a:p/>
+        </p:txBody>
       </p:sp>
       <p:sp>
         <p:nvSpPr>
@@ -5293,7 +5318,7 @@
                 <a:ea typeface="Prompt" pitchFamily="34" charset="-122"/>
                 <a:cs typeface="Prompt" pitchFamily="34" charset="-120"/>
               </a:rPr>
-              <a:t>เทียบผลกับภาพดาวเทียม GISTDA และเหตุการณ์น้ำท่วมในอดีต</a:t>
+              <a:t>ขยายการเทียบดาวเทียมทั้งจังหวัด + ข้อมูลประตูน้ำ/บึงจาก ชป.</a:t>
             </a:r>
             <a:endParaRPr lang="en-US" sz="1650" dirty="0"/>
           </a:p>
@@ -6192,7 +6217,7 @@
                 <a:ea typeface="Prompt" pitchFamily="34" charset="-122"/>
                 <a:cs typeface="Prompt" pitchFamily="34" charset="-120"/>
               </a:rPr>
-              <a:t>ข้อมูล ณ 28 ก.ย. 2569 เวลา 20:57 น. · ตัวเลขทั้งหมดเป็นผลแบบจำลอง</a:t>
+              <a:t>ข้อมูล ณ 28 ก.ย. 2569 เวลา 20:57 น. · ผลแอ่งท่าตะโก 30 ก.ย. 2569 · ตัวเลขทั้งหมดเป็นผลแบบจำลอง</a:t>
             </a:r>
             <a:endParaRPr lang="en-US" sz="1200" dirty="0"/>
           </a:p>
@@ -6255,6 +6280,943 @@
           </a:prstGeom>
         </p:spPr>
       </p:pic>
+    </p:spTree>
+  </p:cSld>
+  <p:clrMapOvr>
+    <a:masterClrMapping/>
+  </p:clrMapOvr>
+</p:sld>
+</file>
+
+<file path=ppt/slides/slide13.xml><?xml version="1.0" encoding="utf-8"?>
+<p:sld xmlns:a="http://schemas.openxmlformats.org/drawingml/2006/main" xmlns:p="http://schemas.openxmlformats.org/presentationml/2006/main" xmlns:r="http://schemas.openxmlformats.org/officeDocument/2006/relationships">
+  <p:cSld>
+    <p:bg>
+      <p:bgPr>
+        <a:solidFill>
+          <a:srgbClr val="FFFFFF"/>
+        </a:solidFill>
+      </p:bgPr>
+    </p:bg>
+    <p:spTree>
+      <p:nvGrpSpPr>
+        <p:cNvPr id="1" name=""/>
+        <p:cNvGrpSpPr/>
+        <p:nvPr/>
+      </p:nvGrpSpPr>
+      <p:grpSpPr/>
+      <p:sp>
+        <p:nvSpPr>
+          <p:cNvPr id="25" name="Slide Number Placeholder 0"/>
+          <p:cNvSpPr>
+            <a:spLocks noGrp="1"/>
+          </p:cNvSpPr>
+          <p:nvPr>
+            <p:ph type="sldNum" sz="quarter" idx="4294967295"/>
+          </p:nvPr>
+        </p:nvSpPr>
+        <p:spPr>
+          <a:xfrm>
+            <a:off x="11277295" y="6419088"/>
+            <a:ext cx="457200" cy="274320"/>
+          </a:xfrm>
+          <a:prstGeom prst="rect">
+            <a:avLst/>
+          </a:prstGeom>
+          <a:extLst>
+            <a:ext uri="{C572A759-6A51-4108-AA02-DFA0A04FC94B}">
+              <ma14:wrappingTextBoxFlag xmlns:ma14="http://schemas.microsoft.com/office/mac/drawingml/2011/main" val="0"/>
+            </a:ext>
+          </a:extLst>
+        </p:spPr>
+        <p:txBody>
+          <a:bodyPr/>
+          <a:lstStyle>
+            <a:lvl1pPr>
+              <a:defRPr sz="900">
+                <a:solidFill>
+                  <a:srgbClr val="64748B"/>
+                </a:solidFill>
+                <a:latin typeface="Prompt"/>
+                <a:ea typeface="Prompt"/>
+                <a:cs typeface="Prompt"/>
+              </a:defRPr>
+            </a:lvl1pPr>
+          </a:lstStyle>
+          <a:p>
+            <a:pPr algn="r"/>
+            <a:fld id="{F7021451-1387-4CA6-816F-3879F97B5CBC}" type="slidenum">
+              <a:rPr b="0" lang="en-US"/>
+              <a:t>2</a:t>
+            </a:fld>
+            <a:endParaRPr lang="en-US"/>
+          </a:p>
+        </p:txBody>
+      </p:sp>
+      <p:sp>
+        <p:nvSpPr>
+          <p:cNvPr id="26" name="TextBox 25"/>
+          <p:cNvSpPr txBox="1"/>
+          <p:nvPr/>
+        </p:nvSpPr>
+        <p:spPr>
+          <a:xfrm>
+            <a:off x="548640" y="347472"/>
+            <a:ext cx="8229600" cy="274320"/>
+          </a:xfrm>
+          <a:prstGeom prst="rect">
+            <a:avLst/>
+          </a:prstGeom>
+          <a:noFill/>
+        </p:spPr>
+        <p:txBody>
+          <a:bodyPr wrap="square" lIns="0" rIns="0" tIns="0" bIns="0" anchor="t">
+            <a:spAutoFit/>
+          </a:bodyPr>
+          <a:lstStyle/>
+          <a:p>
+            <a:pPr algn="l"/>
+            <a:r>
+              <a:rPr sz="1200" b="1" i="0">
+                <a:solidFill>
+                  <a:srgbClr val="1B998B"/>
+                </a:solidFill>
+                <a:latin typeface="Prompt"/>
+                <a:ea typeface="Prompt"/>
+                <a:cs typeface="Prompt"/>
+              </a:rPr>
+              <a:t>พิสูจน์กับน้ำท่วมจริง</a:t>
+            </a:r>
+          </a:p>
+        </p:txBody>
+      </p:sp>
+      <p:sp>
+        <p:nvSpPr>
+          <p:cNvPr id="27" name="TextBox 26"/>
+          <p:cNvSpPr txBox="1"/>
+          <p:nvPr/>
+        </p:nvSpPr>
+        <p:spPr>
+          <a:xfrm>
+            <a:off x="548640" y="621792"/>
+            <a:ext cx="11091672" cy="685800"/>
+          </a:xfrm>
+          <a:prstGeom prst="rect">
+            <a:avLst/>
+          </a:prstGeom>
+          <a:noFill/>
+        </p:spPr>
+        <p:txBody>
+          <a:bodyPr wrap="square" lIns="0" rIns="0" tIns="0" bIns="0" anchor="ctr">
+            <a:spAutoFit/>
+          </a:bodyPr>
+          <a:lstStyle/>
+          <a:p>
+            <a:pPr algn="l"/>
+            <a:r>
+              <a:rPr sz="2600" b="1" i="0">
+                <a:solidFill>
+                  <a:srgbClr val="0B3C5D"/>
+                </a:solidFill>
+                <a:latin typeface="Prompt"/>
+                <a:ea typeface="Prompt"/>
+                <a:cs typeface="Prompt"/>
+              </a:rPr>
+              <a:t>ตัวอย่างแอ่งท่าตะโก: แบบจำลองตรงกับภาพดาวเทียมย้อนหลัง</a:t>
+            </a:r>
+          </a:p>
+        </p:txBody>
+      </p:sp>
+      <p:sp>
+        <p:nvSpPr>
+          <p:cNvPr id="28" name="Rounded Rectangle 27"/>
+          <p:cNvSpPr/>
+          <p:nvPr/>
+        </p:nvSpPr>
+        <p:spPr>
+          <a:xfrm>
+            <a:off x="493776" y="1426464"/>
+            <a:ext cx="4956048" cy="4352544"/>
+          </a:xfrm>
+          <a:prstGeom prst="roundRect">
+            <a:avLst>
+              <a:gd name="adj" fmla="val 1600"/>
+            </a:avLst>
+          </a:prstGeom>
+          <a:solidFill>
+            <a:srgbClr val="FFFFFF"/>
+          </a:solidFill>
+          <a:ln w="9525">
+            <a:solidFill>
+              <a:srgbClr val="D5DEE6"/>
+            </a:solidFill>
+          </a:ln>
+          <a:effectLst/>
+        </p:spPr>
+        <p:style>
+          <a:lnRef idx="1">
+            <a:schemeClr val="accent1"/>
+          </a:lnRef>
+          <a:fillRef idx="3">
+            <a:schemeClr val="accent1"/>
+          </a:fillRef>
+          <a:effectRef idx="2">
+            <a:schemeClr val="accent1"/>
+          </a:effectRef>
+          <a:fontRef idx="minor">
+            <a:schemeClr val="lt1"/>
+          </a:fontRef>
+        </p:style>
+        <p:txBody>
+          <a:bodyPr rtlCol="0" anchor="ctr"/>
+          <a:lstStyle/>
+          <a:p/>
+        </p:txBody>
+      </p:sp>
+      <p:pic>
+        <p:nvPicPr>
+          <p:cNvPr id="29" name="Picture 28" descr="map_ev2025.png"/>
+          <p:cNvPicPr>
+            <a:picLocks noChangeAspect="1"/>
+          </p:cNvPicPr>
+          <p:nvPr/>
+        </p:nvPicPr>
+        <p:blipFill>
+          <a:blip r:embed="rId2"/>
+          <a:stretch>
+            <a:fillRect/>
+          </a:stretch>
+        </p:blipFill>
+        <p:spPr>
+          <a:xfrm>
+            <a:off x="548640" y="1481328"/>
+            <a:ext cx="4846320" cy="4242816"/>
+          </a:xfrm>
+          <a:prstGeom prst="rect">
+            <a:avLst/>
+          </a:prstGeom>
+        </p:spPr>
+      </p:pic>
+      <p:sp>
+        <p:nvSpPr>
+          <p:cNvPr id="30" name="TextBox 29"/>
+          <p:cNvSpPr txBox="1"/>
+          <p:nvPr/>
+        </p:nvSpPr>
+        <p:spPr>
+          <a:xfrm>
+            <a:off x="548640" y="5797296"/>
+            <a:ext cx="4846320" cy="457200"/>
+          </a:xfrm>
+          <a:prstGeom prst="rect">
+            <a:avLst/>
+          </a:prstGeom>
+          <a:noFill/>
+        </p:spPr>
+        <p:txBody>
+          <a:bodyPr wrap="square" lIns="0" rIns="0" tIns="0" bIns="0" anchor="t">
+            <a:spAutoFit/>
+          </a:bodyPr>
+          <a:lstStyle/>
+          <a:p>
+            <a:pPr algn="l"/>
+            <a:r>
+              <a:rPr sz="1050" b="0" i="0">
+                <a:solidFill>
+                  <a:srgbClr val="64748B"/>
+                </a:solidFill>
+                <a:latin typeface="Prompt"/>
+                <a:ea typeface="Prompt"/>
+                <a:cs typeface="Prompt"/>
+              </a:rPr>
+              <a:t>ปี 2568: พื้นที่ท่วมนาน 30 วันขึ้นไป — น้ำเงิน = แบบจำลองกับดาวเทียมตรงกัน</a:t>
+            </a:r>
+          </a:p>
+        </p:txBody>
+      </p:sp>
+      <p:sp>
+        <p:nvSpPr>
+          <p:cNvPr id="31" name="Rounded Rectangle 30"/>
+          <p:cNvSpPr/>
+          <p:nvPr/>
+        </p:nvSpPr>
+        <p:spPr>
+          <a:xfrm>
+            <a:off x="5760720" y="1481328"/>
+            <a:ext cx="1874519" cy="1463040"/>
+          </a:xfrm>
+          <a:prstGeom prst="roundRect">
+            <a:avLst>
+              <a:gd name="adj" fmla="val 6000"/>
+            </a:avLst>
+          </a:prstGeom>
+          <a:solidFill>
+            <a:srgbClr val="EEF5F9"/>
+          </a:solidFill>
+          <a:ln>
+            <a:noFill/>
+          </a:ln>
+          <a:effectLst/>
+        </p:spPr>
+        <p:style>
+          <a:lnRef idx="1">
+            <a:schemeClr val="accent1"/>
+          </a:lnRef>
+          <a:fillRef idx="3">
+            <a:schemeClr val="accent1"/>
+          </a:fillRef>
+          <a:effectRef idx="2">
+            <a:schemeClr val="accent1"/>
+          </a:effectRef>
+          <a:fontRef idx="minor">
+            <a:schemeClr val="lt1"/>
+          </a:fontRef>
+        </p:style>
+        <p:txBody>
+          <a:bodyPr rtlCol="0" anchor="ctr"/>
+          <a:lstStyle/>
+          <a:p/>
+        </p:txBody>
+      </p:sp>
+      <p:sp>
+        <p:nvSpPr>
+          <p:cNvPr id="32" name="TextBox 31"/>
+          <p:cNvSpPr txBox="1"/>
+          <p:nvPr/>
+        </p:nvSpPr>
+        <p:spPr>
+          <a:xfrm>
+            <a:off x="5961888" y="1609344"/>
+            <a:ext cx="1508760" cy="658368"/>
+          </a:xfrm>
+          <a:prstGeom prst="rect">
+            <a:avLst/>
+          </a:prstGeom>
+          <a:noFill/>
+        </p:spPr>
+        <p:txBody>
+          <a:bodyPr wrap="square" lIns="0" rIns="0" tIns="0" bIns="0" anchor="ctr">
+            <a:spAutoFit/>
+          </a:bodyPr>
+          <a:lstStyle/>
+          <a:p>
+            <a:pPr algn="l"/>
+            <a:r>
+              <a:rPr sz="2800" b="1" i="0">
+                <a:solidFill>
+                  <a:srgbClr val="0B3C5D"/>
+                </a:solidFill>
+                <a:latin typeface="Prompt"/>
+                <a:ea typeface="Prompt"/>
+                <a:cs typeface="Prompt"/>
+              </a:rPr>
+              <a:t>9</a:t>
+            </a:r>
+            <a:r>
+              <a:rPr sz="1300" b="0" i="0">
+                <a:solidFill>
+                  <a:srgbClr val="64748B"/>
+                </a:solidFill>
+                <a:latin typeface="Prompt"/>
+                <a:ea typeface="Prompt"/>
+                <a:cs typeface="Prompt"/>
+              </a:rPr>
+              <a:t>  ปี</a:t>
+            </a:r>
+          </a:p>
+        </p:txBody>
+      </p:sp>
+      <p:sp>
+        <p:nvSpPr>
+          <p:cNvPr id="33" name="TextBox 32"/>
+          <p:cNvSpPr txBox="1"/>
+          <p:nvPr/>
+        </p:nvSpPr>
+        <p:spPr>
+          <a:xfrm>
+            <a:off x="5961888" y="2296972"/>
+            <a:ext cx="1508760" cy="658368"/>
+          </a:xfrm>
+          <a:prstGeom prst="rect">
+            <a:avLst/>
+          </a:prstGeom>
+          <a:noFill/>
+        </p:spPr>
+        <p:txBody>
+          <a:bodyPr wrap="square" lIns="0" rIns="0" tIns="0" bIns="0" anchor="t">
+            <a:spAutoFit/>
+          </a:bodyPr>
+          <a:lstStyle/>
+          <a:p>
+            <a:pPr algn="l"/>
+            <a:r>
+              <a:rPr sz="1150" b="0" i="0">
+                <a:solidFill>
+                  <a:srgbClr val="1E293B"/>
+                </a:solidFill>
+                <a:latin typeface="Prompt"/>
+                <a:ea typeface="Prompt"/>
+                <a:cs typeface="Prompt"/>
+              </a:rPr>
+              <a:t>ภาพเรดาร์ย้อนหลัง 148 ภาพ มองทะลุเมฆ</a:t>
+            </a:r>
+          </a:p>
+        </p:txBody>
+      </p:sp>
+      <p:sp>
+        <p:nvSpPr>
+          <p:cNvPr id="34" name="Rounded Rectangle 33"/>
+          <p:cNvSpPr/>
+          <p:nvPr/>
+        </p:nvSpPr>
+        <p:spPr>
+          <a:xfrm>
+            <a:off x="7763256" y="1481328"/>
+            <a:ext cx="1874519" cy="1463040"/>
+          </a:xfrm>
+          <a:prstGeom prst="roundRect">
+            <a:avLst>
+              <a:gd name="adj" fmla="val 6000"/>
+            </a:avLst>
+          </a:prstGeom>
+          <a:solidFill>
+            <a:srgbClr val="EEF5F9"/>
+          </a:solidFill>
+          <a:ln>
+            <a:noFill/>
+          </a:ln>
+          <a:effectLst/>
+        </p:spPr>
+        <p:style>
+          <a:lnRef idx="1">
+            <a:schemeClr val="accent1"/>
+          </a:lnRef>
+          <a:fillRef idx="3">
+            <a:schemeClr val="accent1"/>
+          </a:fillRef>
+          <a:effectRef idx="2">
+            <a:schemeClr val="accent1"/>
+          </a:effectRef>
+          <a:fontRef idx="minor">
+            <a:schemeClr val="lt1"/>
+          </a:fontRef>
+        </p:style>
+        <p:txBody>
+          <a:bodyPr rtlCol="0" anchor="ctr"/>
+          <a:lstStyle/>
+          <a:p/>
+        </p:txBody>
+      </p:sp>
+      <p:sp>
+        <p:nvSpPr>
+          <p:cNvPr id="35" name="TextBox 34"/>
+          <p:cNvSpPr txBox="1"/>
+          <p:nvPr/>
+        </p:nvSpPr>
+        <p:spPr>
+          <a:xfrm>
+            <a:off x="7964424" y="1609344"/>
+            <a:ext cx="1508760" cy="658368"/>
+          </a:xfrm>
+          <a:prstGeom prst="rect">
+            <a:avLst/>
+          </a:prstGeom>
+          <a:noFill/>
+        </p:spPr>
+        <p:txBody>
+          <a:bodyPr wrap="square" lIns="0" rIns="0" tIns="0" bIns="0" anchor="ctr">
+            <a:spAutoFit/>
+          </a:bodyPr>
+          <a:lstStyle/>
+          <a:p>
+            <a:pPr algn="l"/>
+            <a:r>
+              <a:rPr sz="2800" b="1" i="0">
+                <a:solidFill>
+                  <a:srgbClr val="D64545"/>
+                </a:solidFill>
+                <a:latin typeface="Prompt"/>
+                <a:ea typeface="Prompt"/>
+                <a:cs typeface="Prompt"/>
+              </a:rPr>
+              <a:t>2–3</a:t>
+            </a:r>
+            <a:r>
+              <a:rPr sz="1300" b="0" i="0">
+                <a:solidFill>
+                  <a:srgbClr val="64748B"/>
+                </a:solidFill>
+                <a:latin typeface="Prompt"/>
+                <a:ea typeface="Prompt"/>
+                <a:cs typeface="Prompt"/>
+              </a:rPr>
+              <a:t>  เดือน</a:t>
+            </a:r>
+          </a:p>
+        </p:txBody>
+      </p:sp>
+      <p:sp>
+        <p:nvSpPr>
+          <p:cNvPr id="36" name="TextBox 35"/>
+          <p:cNvSpPr txBox="1"/>
+          <p:nvPr/>
+        </p:nvSpPr>
+        <p:spPr>
+          <a:xfrm>
+            <a:off x="7964424" y="2296972"/>
+            <a:ext cx="1508760" cy="658368"/>
+          </a:xfrm>
+          <a:prstGeom prst="rect">
+            <a:avLst/>
+          </a:prstGeom>
+          <a:noFill/>
+        </p:spPr>
+        <p:txBody>
+          <a:bodyPr wrap="square" lIns="0" rIns="0" tIns="0" bIns="0" anchor="t">
+            <a:spAutoFit/>
+          </a:bodyPr>
+          <a:lstStyle/>
+          <a:p>
+            <a:pPr algn="l"/>
+            <a:r>
+              <a:rPr sz="1150" b="0" i="0">
+                <a:solidFill>
+                  <a:srgbClr val="1E293B"/>
+                </a:solidFill>
+                <a:latin typeface="Prompt"/>
+                <a:ea typeface="Prompt"/>
+                <a:cs typeface="Prompt"/>
+              </a:rPr>
+              <a:t>น้ำขังรอบบึงบอระเพ็ด ตรงกับที่ชาวบ้านเล่า</a:t>
+            </a:r>
+          </a:p>
+        </p:txBody>
+      </p:sp>
+      <p:sp>
+        <p:nvSpPr>
+          <p:cNvPr id="37" name="Rounded Rectangle 36"/>
+          <p:cNvSpPr/>
+          <p:nvPr/>
+        </p:nvSpPr>
+        <p:spPr>
+          <a:xfrm>
+            <a:off x="9765792" y="1481328"/>
+            <a:ext cx="1874519" cy="1463040"/>
+          </a:xfrm>
+          <a:prstGeom prst="roundRect">
+            <a:avLst>
+              <a:gd name="adj" fmla="val 6000"/>
+            </a:avLst>
+          </a:prstGeom>
+          <a:solidFill>
+            <a:srgbClr val="EEF5F9"/>
+          </a:solidFill>
+          <a:ln>
+            <a:noFill/>
+          </a:ln>
+          <a:effectLst/>
+        </p:spPr>
+        <p:style>
+          <a:lnRef idx="1">
+            <a:schemeClr val="accent1"/>
+          </a:lnRef>
+          <a:fillRef idx="3">
+            <a:schemeClr val="accent1"/>
+          </a:fillRef>
+          <a:effectRef idx="2">
+            <a:schemeClr val="accent1"/>
+          </a:effectRef>
+          <a:fontRef idx="minor">
+            <a:schemeClr val="lt1"/>
+          </a:fontRef>
+        </p:style>
+        <p:txBody>
+          <a:bodyPr rtlCol="0" anchor="ctr"/>
+          <a:lstStyle/>
+          <a:p/>
+        </p:txBody>
+      </p:sp>
+      <p:sp>
+        <p:nvSpPr>
+          <p:cNvPr id="38" name="TextBox 37"/>
+          <p:cNvSpPr txBox="1"/>
+          <p:nvPr/>
+        </p:nvSpPr>
+        <p:spPr>
+          <a:xfrm>
+            <a:off x="9966960" y="1609344"/>
+            <a:ext cx="1508760" cy="658368"/>
+          </a:xfrm>
+          <a:prstGeom prst="rect">
+            <a:avLst/>
+          </a:prstGeom>
+          <a:noFill/>
+        </p:spPr>
+        <p:txBody>
+          <a:bodyPr wrap="square" lIns="0" rIns="0" tIns="0" bIns="0" anchor="ctr">
+            <a:spAutoFit/>
+          </a:bodyPr>
+          <a:lstStyle/>
+          <a:p>
+            <a:pPr algn="l"/>
+            <a:r>
+              <a:rPr sz="2800" b="1" i="0">
+                <a:solidFill>
+                  <a:srgbClr val="1B998B"/>
+                </a:solidFill>
+                <a:latin typeface="Prompt"/>
+                <a:ea typeface="Prompt"/>
+                <a:cs typeface="Prompt"/>
+              </a:rPr>
+              <a:t>~0.5</a:t>
+            </a:r>
+            <a:r>
+              <a:rPr sz="1300" b="0" i="0">
+                <a:solidFill>
+                  <a:srgbClr val="64748B"/>
+                </a:solidFill>
+                <a:latin typeface="Prompt"/>
+                <a:ea typeface="Prompt"/>
+                <a:cs typeface="Prompt"/>
+              </a:rPr>
+              <a:t>  CSI</a:t>
+            </a:r>
+          </a:p>
+        </p:txBody>
+      </p:sp>
+      <p:sp>
+        <p:nvSpPr>
+          <p:cNvPr id="39" name="TextBox 38"/>
+          <p:cNvSpPr txBox="1"/>
+          <p:nvPr/>
+        </p:nvSpPr>
+        <p:spPr>
+          <a:xfrm>
+            <a:off x="9966960" y="2296972"/>
+            <a:ext cx="1508760" cy="658368"/>
+          </a:xfrm>
+          <a:prstGeom prst="rect">
+            <a:avLst/>
+          </a:prstGeom>
+          <a:noFill/>
+        </p:spPr>
+        <p:txBody>
+          <a:bodyPr wrap="square" lIns="0" rIns="0" tIns="0" bIns="0" anchor="t">
+            <a:spAutoFit/>
+          </a:bodyPr>
+          <a:lstStyle/>
+          <a:p>
+            <a:pPr algn="l"/>
+            <a:r>
+              <a:rPr sz="1150" b="0" i="0">
+                <a:solidFill>
+                  <a:srgbClr val="1E293B"/>
+                </a:solidFill>
+                <a:latin typeface="Prompt"/>
+                <a:ea typeface="Prompt"/>
+                <a:cs typeface="Prompt"/>
+              </a:rPr>
+              <a:t>ความแม่นยำเชิงพื้นที่ 3 เหตุการณ์</a:t>
+            </a:r>
+          </a:p>
+        </p:txBody>
+      </p:sp>
+      <p:sp>
+        <p:nvSpPr>
+          <p:cNvPr id="40" name="Rounded Rectangle 39"/>
+          <p:cNvSpPr/>
+          <p:nvPr/>
+        </p:nvSpPr>
+        <p:spPr>
+          <a:xfrm>
+            <a:off x="5760720" y="3108960"/>
+            <a:ext cx="5879592" cy="1600200"/>
+          </a:xfrm>
+          <a:prstGeom prst="roundRect">
+            <a:avLst>
+              <a:gd name="adj" fmla="val 6000"/>
+            </a:avLst>
+          </a:prstGeom>
+          <a:solidFill>
+            <a:srgbClr val="EEF5F9"/>
+          </a:solidFill>
+          <a:ln>
+            <a:noFill/>
+          </a:ln>
+          <a:effectLst/>
+        </p:spPr>
+        <p:style>
+          <a:lnRef idx="1">
+            <a:schemeClr val="accent1"/>
+          </a:lnRef>
+          <a:fillRef idx="3">
+            <a:schemeClr val="accent1"/>
+          </a:fillRef>
+          <a:effectRef idx="2">
+            <a:schemeClr val="accent1"/>
+          </a:effectRef>
+          <a:fontRef idx="minor">
+            <a:schemeClr val="lt1"/>
+          </a:fontRef>
+        </p:style>
+        <p:txBody>
+          <a:bodyPr rtlCol="0" anchor="ctr"/>
+          <a:lstStyle/>
+          <a:p/>
+        </p:txBody>
+      </p:sp>
+      <p:sp>
+        <p:nvSpPr>
+          <p:cNvPr id="41" name="TextBox 40"/>
+          <p:cNvSpPr txBox="1"/>
+          <p:nvPr/>
+        </p:nvSpPr>
+        <p:spPr>
+          <a:xfrm>
+            <a:off x="5961888" y="3218688"/>
+            <a:ext cx="5486400" cy="365760"/>
+          </a:xfrm>
+          <a:prstGeom prst="rect">
+            <a:avLst/>
+          </a:prstGeom>
+          <a:noFill/>
+        </p:spPr>
+        <p:txBody>
+          <a:bodyPr wrap="square" lIns="0" rIns="0" tIns="0" bIns="0" anchor="t">
+            <a:spAutoFit/>
+          </a:bodyPr>
+          <a:lstStyle/>
+          <a:p>
+            <a:pPr algn="l"/>
+            <a:r>
+              <a:rPr sz="1400" b="1" i="0">
+                <a:solidFill>
+                  <a:srgbClr val="0B3C5D"/>
+                </a:solidFill>
+                <a:latin typeface="Prompt"/>
+                <a:ea typeface="Prompt"/>
+                <a:cs typeface="Prompt"/>
+              </a:rPr>
+              <a:t>สิ่งที่ได้จากการวิเคราะห์</a:t>
+            </a:r>
+          </a:p>
+        </p:txBody>
+      </p:sp>
+      <p:sp>
+        <p:nvSpPr>
+          <p:cNvPr id="42" name="TextBox 41"/>
+          <p:cNvSpPr txBox="1"/>
+          <p:nvPr/>
+        </p:nvSpPr>
+        <p:spPr>
+          <a:xfrm>
+            <a:off x="5961888" y="3611880"/>
+            <a:ext cx="5486400" cy="1051560"/>
+          </a:xfrm>
+          <a:prstGeom prst="rect">
+            <a:avLst/>
+          </a:prstGeom>
+          <a:noFill/>
+        </p:spPr>
+        <p:txBody>
+          <a:bodyPr wrap="square" lIns="0" rIns="0" tIns="0" bIns="0" anchor="t">
+            <a:spAutoFit/>
+          </a:bodyPr>
+          <a:lstStyle/>
+          <a:p>
+            <a:pPr algn="l" marL="228600" indent="-228600">
+              <a:buFont typeface="Arial"/>
+              <a:buChar char="•"/>
+            </a:pPr>
+            <a:r>
+              <a:rPr sz="1200" b="0" i="0">
+                <a:solidFill>
+                  <a:srgbClr val="1E293B"/>
+                </a:solidFill>
+                <a:latin typeface="Prompt"/>
+                <a:ea typeface="Prompt"/>
+                <a:cs typeface="Prompt"/>
+              </a:rPr>
+              <a:t>พื้นที่ที่ท่วมซ้ำทุกปีน้ำมาก: ทับกฤช วังมหากร พนมเศษ พระนอน</a:t>
+            </a:r>
+          </a:p>
+          <a:p>
+            <a:pPr algn="l" marL="228600" indent="-228600">
+              <a:spcBef>
+                <a:spcPts val="300"/>
+              </a:spcBef>
+              <a:buFont typeface="Arial"/>
+              <a:buChar char="•"/>
+            </a:pPr>
+            <a:r>
+              <a:rPr sz="1200" b="0" i="0">
+                <a:solidFill>
+                  <a:srgbClr val="1E293B"/>
+                </a:solidFill>
+                <a:latin typeface="Prompt"/>
+                <a:ea typeface="Prompt"/>
+                <a:cs typeface="Prompt"/>
+              </a:rPr>
+              <a:t>จำลองพื้นที่ท่วมนานได้ใกล้ของจริง (ต่างไม่เกิน ~20%)</a:t>
+            </a:r>
+          </a:p>
+        </p:txBody>
+      </p:sp>
+      <p:sp>
+        <p:nvSpPr>
+          <p:cNvPr id="43" name="Rounded Rectangle 42"/>
+          <p:cNvSpPr/>
+          <p:nvPr/>
+        </p:nvSpPr>
+        <p:spPr>
+          <a:xfrm>
+            <a:off x="5760720" y="4846320"/>
+            <a:ext cx="5879592" cy="1417320"/>
+          </a:xfrm>
+          <a:prstGeom prst="roundRect">
+            <a:avLst>
+              <a:gd name="adj" fmla="val 6000"/>
+            </a:avLst>
+          </a:prstGeom>
+          <a:solidFill>
+            <a:srgbClr val="FFF4E5"/>
+          </a:solidFill>
+          <a:ln>
+            <a:noFill/>
+          </a:ln>
+          <a:effectLst/>
+        </p:spPr>
+        <p:style>
+          <a:lnRef idx="1">
+            <a:schemeClr val="accent1"/>
+          </a:lnRef>
+          <a:fillRef idx="3">
+            <a:schemeClr val="accent1"/>
+          </a:fillRef>
+          <a:effectRef idx="2">
+            <a:schemeClr val="accent1"/>
+          </a:effectRef>
+          <a:fontRef idx="minor">
+            <a:schemeClr val="lt1"/>
+          </a:fontRef>
+        </p:style>
+        <p:txBody>
+          <a:bodyPr rtlCol="0" anchor="ctr"/>
+          <a:lstStyle/>
+          <a:p/>
+        </p:txBody>
+      </p:sp>
+      <p:sp>
+        <p:nvSpPr>
+          <p:cNvPr id="44" name="TextBox 43"/>
+          <p:cNvSpPr txBox="1"/>
+          <p:nvPr/>
+        </p:nvSpPr>
+        <p:spPr>
+          <a:xfrm>
+            <a:off x="5961888" y="4937760"/>
+            <a:ext cx="5486400" cy="365760"/>
+          </a:xfrm>
+          <a:prstGeom prst="rect">
+            <a:avLst/>
+          </a:prstGeom>
+          <a:noFill/>
+        </p:spPr>
+        <p:txBody>
+          <a:bodyPr wrap="square" lIns="0" rIns="0" tIns="0" bIns="0" anchor="t">
+            <a:spAutoFit/>
+          </a:bodyPr>
+          <a:lstStyle/>
+          <a:p>
+            <a:pPr algn="l"/>
+            <a:r>
+              <a:rPr sz="1400" b="1" i="0">
+                <a:solidFill>
+                  <a:srgbClr val="0B3C5D"/>
+                </a:solidFill>
+                <a:latin typeface="Prompt"/>
+                <a:ea typeface="Prompt"/>
+                <a:cs typeface="Prompt"/>
+              </a:rPr>
+              <a:t>นัยต่อการบริหารน้ำ</a:t>
+            </a:r>
+          </a:p>
+        </p:txBody>
+      </p:sp>
+      <p:sp>
+        <p:nvSpPr>
+          <p:cNvPr id="45" name="TextBox 44"/>
+          <p:cNvSpPr txBox="1"/>
+          <p:nvPr/>
+        </p:nvSpPr>
+        <p:spPr>
+          <a:xfrm>
+            <a:off x="5961888" y="5321808"/>
+            <a:ext cx="5486400" cy="914400"/>
+          </a:xfrm>
+          <a:prstGeom prst="rect">
+            <a:avLst/>
+          </a:prstGeom>
+          <a:noFill/>
+        </p:spPr>
+        <p:txBody>
+          <a:bodyPr wrap="square" lIns="0" rIns="0" tIns="0" bIns="0" anchor="t">
+            <a:spAutoFit/>
+          </a:bodyPr>
+          <a:lstStyle/>
+          <a:p>
+            <a:pPr algn="l"/>
+            <a:r>
+              <a:rPr sz="1200" b="0" i="0">
+                <a:solidFill>
+                  <a:srgbClr val="1E293B"/>
+                </a:solidFill>
+                <a:latin typeface="Prompt"/>
+                <a:ea typeface="Prompt"/>
+                <a:cs typeface="Prompt"/>
+              </a:rPr>
+              <a:t>ท่วมนานเพราะน้ำจากแม่น้ำเข้าบึงผ่านคลองและประตูน้ำ ก่อนระดับน้ำถึงตลิ่ง → จัดการที่ประตูน้ำ/คลองตรงจุดได้ผลกว่าเฝ้าดูแค่ระดับตลิ่ง</a:t>
+            </a:r>
+          </a:p>
+        </p:txBody>
+      </p:sp>
+      <p:sp>
+        <p:nvSpPr>
+          <p:cNvPr id="46" name="TextBox 45"/>
+          <p:cNvSpPr txBox="1"/>
+          <p:nvPr/>
+        </p:nvSpPr>
+        <p:spPr>
+          <a:xfrm>
+            <a:off x="548640" y="6400800"/>
+            <a:ext cx="10332720" cy="274320"/>
+          </a:xfrm>
+          <a:prstGeom prst="rect">
+            <a:avLst/>
+          </a:prstGeom>
+          <a:noFill/>
+        </p:spPr>
+        <p:txBody>
+          <a:bodyPr wrap="square" lIns="0" rIns="0" tIns="0" bIns="0" anchor="t">
+            <a:spAutoFit/>
+          </a:bodyPr>
+          <a:lstStyle/>
+          <a:p>
+            <a:pPr algn="l"/>
+            <a:r>
+              <a:rPr sz="900" b="0" i="0">
+                <a:solidFill>
+                  <a:srgbClr val="64748B"/>
+                </a:solidFill>
+                <a:latin typeface="Prompt"/>
+                <a:ea typeface="Prompt"/>
+                <a:cs typeface="Prompt"/>
+              </a:rPr>
+              <a:t>Sentinel-1 (Copernicus) ผ่าน Microsoft Planetary Computer · ระดับน้ำจริง ThaiWater (สสน.) · ฝน ERA5 · CSI = พื้นที่ตรงกัน ÷ (ตรงกัน + ขาด + เกิน)</a:t>
+            </a:r>
+          </a:p>
+        </p:txBody>
+      </p:sp>
     </p:spTree>
   </p:cSld>
   <p:clrMapOvr>

--- a/docs/report/NakhonSawanFlood_ลูกค้าและหน่วยงานราชการ.pptx
+++ b/docs/report/NakhonSawanFlood_ลูกค้าและหน่วยงานราชการ.pptx
@@ -12,6 +12,7 @@
     <p:sldId id="260" r:id="rId6"/>
     <p:sldId id="261" r:id="rId7"/>
     <p:sldId id="268" r:id="rId19"/>
+    <p:sldId id="269" r:id="rId20"/>
     <p:sldId id="262" r:id="rId8"/>
     <p:sldId id="263" r:id="rId9"/>
     <p:sldId id="264" r:id="rId10"/>
@@ -3786,6 +3787,10 @@
             </a:outerShdw>
           </a:effectLst>
         </p:spPr>
+        <p:txBody>
+          <a:bodyPr/>
+          <a:p/>
+        </p:txBody>
       </p:sp>
       <p:pic>
         <p:nvPicPr>
@@ -3819,6 +3824,804 @@
 </file>
 
 <file path=ppt/slides/slide10.xml><?xml version="1.0" encoding="utf-8"?>
+<p:sld xmlns:a="http://schemas.openxmlformats.org/drawingml/2006/main" xmlns:r="http://schemas.openxmlformats.org/officeDocument/2006/relationships" xmlns:p="http://schemas.openxmlformats.org/presentationml/2006/main">
+  <p:cSld name="Slide 9">
+    <p:bg>
+      <p:bgPr>
+        <a:solidFill>
+          <a:srgbClr val="FFFFFF"/>
+        </a:solidFill>
+      </p:bgPr>
+    </p:bg>
+    <p:spTree>
+      <p:nvGrpSpPr>
+        <p:cNvPr id="1" name=""/>
+        <p:cNvGrpSpPr/>
+        <p:nvPr/>
+      </p:nvGrpSpPr>
+      <p:grpSpPr>
+        <a:xfrm>
+          <a:off x="0" y="0"/>
+          <a:ext cx="0" cy="0"/>
+          <a:chOff x="0" y="0"/>
+          <a:chExt cx="0" cy="0"/>
+        </a:xfrm>
+      </p:grpSpPr>
+      <p:sp>
+        <p:nvSpPr>
+          <p:cNvPr id="2" name="Text 0"/>
+          <p:cNvSpPr txBox="1"/>
+          <p:nvPr/>
+        </p:nvSpPr>
+        <p:spPr>
+          <a:xfrm>
+            <a:off x="548640" y="347472"/>
+            <a:ext cx="8229600" cy="274320"/>
+          </a:xfrm>
+          <a:prstGeom prst="rect">
+            <a:avLst/>
+          </a:prstGeom>
+          <a:noFill/>
+          <a:ln/>
+        </p:spPr>
+        <p:txBody>
+          <a:bodyPr wrap="square" lIns="0" tIns="0" rIns="0" bIns="0" rtlCol="0" anchor="t"/>
+          <a:lstStyle/>
+          <a:p>
+            <a:pPr indent="0" marL="0">
+              <a:buNone/>
+            </a:pPr>
+            <a:r>
+              <a:rPr lang="en-US" sz="1200" b="1" spc="100" kern="0" dirty="0">
+                <a:solidFill>
+                  <a:srgbClr val="1B998B"/>
+                </a:solidFill>
+                <a:latin typeface="Prompt" pitchFamily="34" charset="0"/>
+                <a:ea typeface="Prompt" pitchFamily="34" charset="-122"/>
+                <a:cs typeface="Prompt" pitchFamily="34" charset="-120"/>
+              </a:rPr>
+              <a:t>การนำไปใช้</a:t>
+            </a:r>
+            <a:endParaRPr lang="en-US" sz="1200" dirty="0"/>
+          </a:p>
+        </p:txBody>
+      </p:sp>
+      <p:sp>
+        <p:nvSpPr>
+          <p:cNvPr id="3" name="Text 1"/>
+          <p:cNvSpPr txBox="1"/>
+          <p:nvPr/>
+        </p:nvSpPr>
+        <p:spPr>
+          <a:xfrm>
+            <a:off x="548640" y="621792"/>
+            <a:ext cx="11094415" cy="685800"/>
+          </a:xfrm>
+          <a:prstGeom prst="rect">
+            <a:avLst/>
+          </a:prstGeom>
+          <a:noFill/>
+          <a:ln/>
+        </p:spPr>
+        <p:txBody>
+          <a:bodyPr wrap="square" lIns="0" tIns="0" rIns="0" bIns="0" rtlCol="0" anchor="ctr"/>
+          <a:lstStyle/>
+          <a:p>
+            <a:pPr indent="0" marL="0">
+              <a:buNone/>
+            </a:pPr>
+            <a:r>
+              <a:rPr lang="en-US" sz="2800" b="1" dirty="0">
+                <a:solidFill>
+                  <a:srgbClr val="0B3C5D"/>
+                </a:solidFill>
+                <a:latin typeface="Prompt" pitchFamily="34" charset="0"/>
+                <a:ea typeface="Prompt" pitchFamily="34" charset="-122"/>
+                <a:cs typeface="Prompt" pitchFamily="34" charset="-120"/>
+              </a:rPr>
+              <a:t>ทางเลือกการติดตั้งใช้งาน</a:t>
+            </a:r>
+            <a:endParaRPr lang="en-US" sz="2800" dirty="0"/>
+          </a:p>
+        </p:txBody>
+      </p:sp>
+      <p:sp>
+        <p:nvSpPr>
+          <p:cNvPr id="4" name="Shape 2"/>
+          <p:cNvSpPr/>
+          <p:nvPr/>
+        </p:nvSpPr>
+        <p:spPr>
+          <a:xfrm>
+            <a:off x="548640" y="1600200"/>
+            <a:ext cx="3547872" cy="3566160"/>
+          </a:xfrm>
+          <a:prstGeom prst="roundRect">
+            <a:avLst>
+              <a:gd name="adj" fmla="val 2577"/>
+            </a:avLst>
+          </a:prstGeom>
+          <a:solidFill>
+            <a:srgbClr val="EEF5F9"/>
+          </a:solidFill>
+          <a:ln w="9525">
+            <a:solidFill>
+              <a:srgbClr val="EEF5F9"/>
+            </a:solidFill>
+            <a:prstDash val="solid"/>
+          </a:ln>
+        </p:spPr>
+        <p:txBody>
+          <a:bodyPr/>
+          <a:p/>
+        </p:txBody>
+      </p:sp>
+      <p:sp>
+        <p:nvSpPr>
+          <p:cNvPr id="5" name="Text 3"/>
+          <p:cNvSpPr txBox="1"/>
+          <p:nvPr/>
+        </p:nvSpPr>
+        <p:spPr>
+          <a:xfrm>
+            <a:off x="749808" y="1764792"/>
+            <a:ext cx="3163824" cy="420624"/>
+          </a:xfrm>
+          <a:prstGeom prst="rect">
+            <a:avLst/>
+          </a:prstGeom>
+          <a:noFill/>
+          <a:ln/>
+        </p:spPr>
+        <p:txBody>
+          <a:bodyPr wrap="square" lIns="0" tIns="0" rIns="0" bIns="0" rtlCol="0" anchor="ctr"/>
+          <a:lstStyle/>
+          <a:p>
+            <a:pPr indent="0" marL="0">
+              <a:buNone/>
+            </a:pPr>
+            <a:r>
+              <a:rPr lang="en-US" sz="1700" b="1" dirty="0">
+                <a:solidFill>
+                  <a:srgbClr val="1B998B"/>
+                </a:solidFill>
+                <a:latin typeface="Prompt" pitchFamily="34" charset="0"/>
+                <a:ea typeface="Prompt" pitchFamily="34" charset="-122"/>
+                <a:cs typeface="Prompt" pitchFamily="34" charset="-120"/>
+              </a:rPr>
+              <a:t>A · เว็บสาธารณะต้นทุนต่ำ</a:t>
+            </a:r>
+            <a:endParaRPr lang="en-US" sz="1700" dirty="0"/>
+          </a:p>
+        </p:txBody>
+      </p:sp>
+      <p:sp>
+        <p:nvSpPr>
+          <p:cNvPr id="6" name="Text 4"/>
+          <p:cNvSpPr txBox="1"/>
+          <p:nvPr/>
+        </p:nvSpPr>
+        <p:spPr>
+          <a:xfrm>
+            <a:off x="749808" y="2295144"/>
+            <a:ext cx="3145536" cy="2734056"/>
+          </a:xfrm>
+          <a:prstGeom prst="rect">
+            <a:avLst/>
+          </a:prstGeom>
+          <a:noFill/>
+          <a:ln/>
+        </p:spPr>
+        <p:txBody>
+          <a:bodyPr wrap="square" lIns="0" tIns="0" rIns="0" bIns="0" rtlCol="0" anchor="t"/>
+          <a:lstStyle/>
+          <a:p>
+            <a:pPr marL="177800" indent="-177800">
+              <a:lnSpc>
+                <a:spcPct val="105000"/>
+              </a:lnSpc>
+              <a:spcAft>
+                <a:spcPts val="400"/>
+              </a:spcAft>
+              <a:buSzPct val="100000"/>
+              <a:buChar char="•"/>
+            </a:pPr>
+            <a:r>
+              <a:rPr lang="en-US" sz="1550" dirty="0">
+                <a:solidFill>
+                  <a:srgbClr val="1E293B"/>
+                </a:solidFill>
+                <a:latin typeface="Prompt" pitchFamily="34" charset="0"/>
+                <a:ea typeface="Prompt" pitchFamily="34" charset="-122"/>
+                <a:cs typeface="Prompt" pitchFamily="34" charset="-120"/>
+              </a:rPr>
+              <a:t>GitHub Pages + GitHub Actions</a:t>
+            </a:r>
+            <a:endParaRPr lang="en-US" sz="1550" dirty="0"/>
+          </a:p>
+          <a:p>
+            <a:pPr marL="177800" indent="-177800">
+              <a:lnSpc>
+                <a:spcPct val="105000"/>
+              </a:lnSpc>
+              <a:spcAft>
+                <a:spcPts val="400"/>
+              </a:spcAft>
+              <a:buSzPct val="100000"/>
+              <a:buChar char="•"/>
+            </a:pPr>
+            <a:r>
+              <a:rPr lang="en-US" sz="1550" dirty="0">
+                <a:solidFill>
+                  <a:srgbClr val="1E293B"/>
+                </a:solidFill>
+                <a:latin typeface="Prompt" pitchFamily="34" charset="0"/>
+                <a:ea typeface="Prompt" pitchFamily="34" charset="-122"/>
+                <a:cs typeface="Prompt" pitchFamily="34" charset="-120"/>
+              </a:rPr>
+              <a:t>ไม่มีค่าเซิร์ฟเวอร์ ไม่ต้องใช้ ArcGIS Online</a:t>
+            </a:r>
+            <a:endParaRPr lang="en-US" sz="1550" dirty="0"/>
+          </a:p>
+          <a:p>
+            <a:pPr marL="177800" indent="-177800">
+              <a:lnSpc>
+                <a:spcPct val="105000"/>
+              </a:lnSpc>
+              <a:spcAft>
+                <a:spcPts val="400"/>
+              </a:spcAft>
+              <a:buSzPct val="100000"/>
+              <a:buChar char="•"/>
+            </a:pPr>
+            <a:r>
+              <a:rPr lang="en-US" sz="1550" dirty="0">
+                <a:solidFill>
+                  <a:srgbClr val="1E293B"/>
+                </a:solidFill>
+                <a:latin typeface="Prompt" pitchFamily="34" charset="0"/>
+                <a:ea typeface="Prompt" pitchFamily="34" charset="-122"/>
+                <a:cs typeface="Prompt" pitchFamily="34" charset="-120"/>
+              </a:rPr>
+              <a:t>เหมาะกับการเผยแพร่ข้อมูลให้ประชาชน</a:t>
+            </a:r>
+            <a:endParaRPr lang="en-US" sz="1550" dirty="0"/>
+          </a:p>
+          <a:p>
+            <a:pPr marL="177800" indent="-177800">
+              <a:lnSpc>
+                <a:spcPct val="105000"/>
+              </a:lnSpc>
+              <a:spcAft>
+                <a:spcPts val="400"/>
+              </a:spcAft>
+              <a:buSzPct val="100000"/>
+              <a:buChar char="•"/>
+            </a:pPr>
+            <a:r>
+              <a:rPr lang="en-US" sz="1550" dirty="0">
+                <a:solidFill>
+                  <a:srgbClr val="1E293B"/>
+                </a:solidFill>
+                <a:latin typeface="Prompt" pitchFamily="34" charset="0"/>
+                <a:ea typeface="Prompt" pitchFamily="34" charset="-122"/>
+                <a:cs typeface="Prompt" pitchFamily="34" charset="-120"/>
+              </a:rPr>
+              <a:t>ต้องตรวจว่าดึงข้อมูล ThaiWater จากต่างประเทศได้</a:t>
+            </a:r>
+            <a:endParaRPr lang="en-US" sz="1550" dirty="0"/>
+          </a:p>
+        </p:txBody>
+      </p:sp>
+      <p:sp>
+        <p:nvSpPr>
+          <p:cNvPr id="7" name="Shape 5"/>
+          <p:cNvSpPr/>
+          <p:nvPr/>
+        </p:nvSpPr>
+        <p:spPr>
+          <a:xfrm>
+            <a:off x="4279392" y="1600200"/>
+            <a:ext cx="3547872" cy="3566160"/>
+          </a:xfrm>
+          <a:prstGeom prst="roundRect">
+            <a:avLst>
+              <a:gd name="adj" fmla="val 2577"/>
+            </a:avLst>
+          </a:prstGeom>
+          <a:solidFill>
+            <a:srgbClr val="EEF5F9"/>
+          </a:solidFill>
+          <a:ln w="9525">
+            <a:solidFill>
+              <a:srgbClr val="EEF5F9"/>
+            </a:solidFill>
+            <a:prstDash val="solid"/>
+          </a:ln>
+        </p:spPr>
+        <p:txBody>
+          <a:bodyPr/>
+          <a:p/>
+        </p:txBody>
+      </p:sp>
+      <p:sp>
+        <p:nvSpPr>
+          <p:cNvPr id="8" name="Text 6"/>
+          <p:cNvSpPr txBox="1"/>
+          <p:nvPr/>
+        </p:nvSpPr>
+        <p:spPr>
+          <a:xfrm>
+            <a:off x="4480560" y="1764792"/>
+            <a:ext cx="3163824" cy="420624"/>
+          </a:xfrm>
+          <a:prstGeom prst="rect">
+            <a:avLst/>
+          </a:prstGeom>
+          <a:noFill/>
+          <a:ln/>
+        </p:spPr>
+        <p:txBody>
+          <a:bodyPr wrap="square" lIns="0" tIns="0" rIns="0" bIns="0" rtlCol="0" anchor="ctr"/>
+          <a:lstStyle/>
+          <a:p>
+            <a:pPr indent="0" marL="0">
+              <a:buNone/>
+            </a:pPr>
+            <a:r>
+              <a:rPr lang="en-US" sz="1700" b="1" dirty="0">
+                <a:solidFill>
+                  <a:srgbClr val="0B3C5D"/>
+                </a:solidFill>
+                <a:latin typeface="Prompt" pitchFamily="34" charset="0"/>
+                <a:ea typeface="Prompt" pitchFamily="34" charset="-122"/>
+                <a:cs typeface="Prompt" pitchFamily="34" charset="-120"/>
+              </a:rPr>
+              <a:t>B · ArcGIS Online / Enterprise</a:t>
+            </a:r>
+            <a:endParaRPr lang="en-US" sz="1700" dirty="0"/>
+          </a:p>
+        </p:txBody>
+      </p:sp>
+      <p:sp>
+        <p:nvSpPr>
+          <p:cNvPr id="9" name="Text 7"/>
+          <p:cNvSpPr txBox="1"/>
+          <p:nvPr/>
+        </p:nvSpPr>
+        <p:spPr>
+          <a:xfrm>
+            <a:off x="4480560" y="2295144"/>
+            <a:ext cx="3145536" cy="2734056"/>
+          </a:xfrm>
+          <a:prstGeom prst="rect">
+            <a:avLst/>
+          </a:prstGeom>
+          <a:noFill/>
+          <a:ln/>
+        </p:spPr>
+        <p:txBody>
+          <a:bodyPr wrap="square" lIns="0" tIns="0" rIns="0" bIns="0" rtlCol="0" anchor="t"/>
+          <a:lstStyle/>
+          <a:p>
+            <a:pPr marL="177800" indent="-177800">
+              <a:lnSpc>
+                <a:spcPct val="105000"/>
+              </a:lnSpc>
+              <a:spcAft>
+                <a:spcPts val="400"/>
+              </a:spcAft>
+              <a:buSzPct val="100000"/>
+              <a:buChar char="•"/>
+            </a:pPr>
+            <a:r>
+              <a:rPr lang="en-US" sz="1550" dirty="0">
+                <a:solidFill>
+                  <a:srgbClr val="1E293B"/>
+                </a:solidFill>
+                <a:latin typeface="Prompt" pitchFamily="34" charset="0"/>
+                <a:ea typeface="Prompt" pitchFamily="34" charset="-122"/>
+                <a:cs typeface="Prompt" pitchFamily="34" charset="-120"/>
+              </a:rPr>
+              <a:t>publish ผลเป็น hosted feature layer</a:t>
+            </a:r>
+            <a:endParaRPr lang="en-US" sz="1550" dirty="0"/>
+          </a:p>
+          <a:p>
+            <a:pPr marL="177800" indent="-177800">
+              <a:lnSpc>
+                <a:spcPct val="105000"/>
+              </a:lnSpc>
+              <a:spcAft>
+                <a:spcPts val="400"/>
+              </a:spcAft>
+              <a:buSzPct val="100000"/>
+              <a:buChar char="•"/>
+            </a:pPr>
+            <a:r>
+              <a:rPr lang="en-US" sz="1550" dirty="0">
+                <a:solidFill>
+                  <a:srgbClr val="1E293B"/>
+                </a:solidFill>
+                <a:latin typeface="Prompt" pitchFamily="34" charset="0"/>
+                <a:ea typeface="Prompt" pitchFamily="34" charset="-122"/>
+                <a:cs typeface="Prompt" pitchFamily="34" charset="-120"/>
+              </a:rPr>
+              <a:t>Dashboards / Experience Builder สำหรับศูนย์บัญชาการ</a:t>
+            </a:r>
+            <a:endParaRPr lang="en-US" sz="1550" dirty="0"/>
+          </a:p>
+          <a:p>
+            <a:pPr marL="177800" indent="-177800">
+              <a:lnSpc>
+                <a:spcPct val="105000"/>
+              </a:lnSpc>
+              <a:spcAft>
+                <a:spcPts val="400"/>
+              </a:spcAft>
+              <a:buSzPct val="100000"/>
+              <a:buChar char="•"/>
+            </a:pPr>
+            <a:r>
+              <a:rPr lang="en-US" sz="1550" dirty="0">
+                <a:solidFill>
+                  <a:srgbClr val="1E293B"/>
+                </a:solidFill>
+                <a:latin typeface="Prompt" pitchFamily="34" charset="0"/>
+                <a:ea typeface="Prompt" pitchFamily="34" charset="-122"/>
+                <a:cs typeface="Prompt" pitchFamily="34" charset="-120"/>
+              </a:rPr>
+              <a:t>จัดสิทธิ์ผู้ใช้ภายในหน่วยงาน</a:t>
+            </a:r>
+            <a:endParaRPr lang="en-US" sz="1550" dirty="0"/>
+          </a:p>
+          <a:p>
+            <a:pPr marL="177800" indent="-177800">
+              <a:lnSpc>
+                <a:spcPct val="105000"/>
+              </a:lnSpc>
+              <a:spcAft>
+                <a:spcPts val="400"/>
+              </a:spcAft>
+              <a:buSzPct val="100000"/>
+              <a:buChar char="•"/>
+            </a:pPr>
+            <a:r>
+              <a:rPr lang="en-US" sz="1550" dirty="0">
+                <a:solidFill>
+                  <a:srgbClr val="1E293B"/>
+                </a:solidFill>
+                <a:latin typeface="Prompt" pitchFamily="34" charset="0"/>
+                <a:ea typeface="Prompt" pitchFamily="34" charset="-122"/>
+                <a:cs typeface="Prompt" pitchFamily="34" charset="-120"/>
+              </a:rPr>
+              <a:t>ใช้ pipeline เดิม เพิ่มขั้นส่งข้อมูล</a:t>
+            </a:r>
+            <a:endParaRPr lang="en-US" sz="1550" dirty="0"/>
+          </a:p>
+        </p:txBody>
+      </p:sp>
+      <p:sp>
+        <p:nvSpPr>
+          <p:cNvPr id="10" name="Shape 8"/>
+          <p:cNvSpPr/>
+          <p:nvPr/>
+        </p:nvSpPr>
+        <p:spPr>
+          <a:xfrm>
+            <a:off x="8010144" y="1600200"/>
+            <a:ext cx="3547872" cy="3566160"/>
+          </a:xfrm>
+          <a:prstGeom prst="roundRect">
+            <a:avLst>
+              <a:gd name="adj" fmla="val 2577"/>
+            </a:avLst>
+          </a:prstGeom>
+          <a:solidFill>
+            <a:srgbClr val="EEF5F9"/>
+          </a:solidFill>
+          <a:ln w="9525">
+            <a:solidFill>
+              <a:srgbClr val="EEF5F9"/>
+            </a:solidFill>
+            <a:prstDash val="solid"/>
+          </a:ln>
+        </p:spPr>
+        <p:txBody>
+          <a:bodyPr/>
+          <a:p/>
+        </p:txBody>
+      </p:sp>
+      <p:sp>
+        <p:nvSpPr>
+          <p:cNvPr id="11" name="Text 9"/>
+          <p:cNvSpPr txBox="1"/>
+          <p:nvPr/>
+        </p:nvSpPr>
+        <p:spPr>
+          <a:xfrm>
+            <a:off x="8211312" y="1764792"/>
+            <a:ext cx="3163824" cy="420624"/>
+          </a:xfrm>
+          <a:prstGeom prst="rect">
+            <a:avLst/>
+          </a:prstGeom>
+          <a:noFill/>
+          <a:ln/>
+        </p:spPr>
+        <p:txBody>
+          <a:bodyPr wrap="square" lIns="0" tIns="0" rIns="0" bIns="0" rtlCol="0" anchor="ctr"/>
+          <a:lstStyle/>
+          <a:p>
+            <a:pPr indent="0" marL="0">
+              <a:buNone/>
+            </a:pPr>
+            <a:r>
+              <a:rPr lang="en-US" sz="1700" b="1" dirty="0">
+                <a:solidFill>
+                  <a:srgbClr val="F2A541"/>
+                </a:solidFill>
+                <a:latin typeface="Prompt" pitchFamily="34" charset="0"/>
+                <a:ea typeface="Prompt" pitchFamily="34" charset="-122"/>
+                <a:cs typeface="Prompt" pitchFamily="34" charset="-120"/>
+              </a:rPr>
+              <a:t>C · ติดตั้งในหน่วยงาน</a:t>
+            </a:r>
+            <a:endParaRPr lang="en-US" sz="1700" dirty="0"/>
+          </a:p>
+        </p:txBody>
+      </p:sp>
+      <p:sp>
+        <p:nvSpPr>
+          <p:cNvPr id="12" name="Text 10"/>
+          <p:cNvSpPr txBox="1"/>
+          <p:nvPr/>
+        </p:nvSpPr>
+        <p:spPr>
+          <a:xfrm>
+            <a:off x="8211312" y="2295144"/>
+            <a:ext cx="3145536" cy="2734056"/>
+          </a:xfrm>
+          <a:prstGeom prst="rect">
+            <a:avLst/>
+          </a:prstGeom>
+          <a:noFill/>
+          <a:ln/>
+        </p:spPr>
+        <p:txBody>
+          <a:bodyPr wrap="square" lIns="0" tIns="0" rIns="0" bIns="0" rtlCol="0" anchor="t"/>
+          <a:lstStyle/>
+          <a:p>
+            <a:pPr marL="177800" indent="-177800">
+              <a:lnSpc>
+                <a:spcPct val="105000"/>
+              </a:lnSpc>
+              <a:spcAft>
+                <a:spcPts val="400"/>
+              </a:spcAft>
+              <a:buSzPct val="100000"/>
+              <a:buChar char="•"/>
+            </a:pPr>
+            <a:r>
+              <a:rPr lang="en-US" sz="1550" dirty="0">
+                <a:solidFill>
+                  <a:srgbClr val="1E293B"/>
+                </a:solidFill>
+                <a:latin typeface="Prompt" pitchFamily="34" charset="0"/>
+                <a:ea typeface="Prompt" pitchFamily="34" charset="-122"/>
+                <a:cs typeface="Prompt" pitchFamily="34" charset="-120"/>
+              </a:rPr>
+              <a:t>รันบนเครื่องที่มี ArcGIS Pro (toolbox พร้อมใช้)</a:t>
+            </a:r>
+            <a:endParaRPr lang="en-US" sz="1550" dirty="0"/>
+          </a:p>
+          <a:p>
+            <a:pPr marL="177800" indent="-177800">
+              <a:lnSpc>
+                <a:spcPct val="105000"/>
+              </a:lnSpc>
+              <a:spcAft>
+                <a:spcPts val="400"/>
+              </a:spcAft>
+              <a:buSzPct val="100000"/>
+              <a:buChar char="•"/>
+            </a:pPr>
+            <a:r>
+              <a:rPr lang="en-US" sz="1550" dirty="0">
+                <a:solidFill>
+                  <a:srgbClr val="1E293B"/>
+                </a:solidFill>
+                <a:latin typeface="Prompt" pitchFamily="34" charset="0"/>
+                <a:ea typeface="Prompt" pitchFamily="34" charset="-122"/>
+                <a:cs typeface="Prompt" pitchFamily="34" charset="-120"/>
+              </a:rPr>
+              <a:t>self-hosted runner ในเครือข่ายหน่วยงาน</a:t>
+            </a:r>
+            <a:endParaRPr lang="en-US" sz="1550" dirty="0"/>
+          </a:p>
+          <a:p>
+            <a:pPr marL="177800" indent="-177800">
+              <a:lnSpc>
+                <a:spcPct val="105000"/>
+              </a:lnSpc>
+              <a:spcAft>
+                <a:spcPts val="400"/>
+              </a:spcAft>
+              <a:buSzPct val="100000"/>
+              <a:buChar char="•"/>
+            </a:pPr>
+            <a:r>
+              <a:rPr lang="en-US" sz="1550" dirty="0">
+                <a:solidFill>
+                  <a:srgbClr val="1E293B"/>
+                </a:solidFill>
+                <a:latin typeface="Prompt" pitchFamily="34" charset="0"/>
+                <a:ea typeface="Prompt" pitchFamily="34" charset="-122"/>
+                <a:cs typeface="Prompt" pitchFamily="34" charset="-120"/>
+              </a:rPr>
+              <a:t>เชื่อมข้อมูลภายใน เช่น สถานีสูบ ประตูน้ำ</a:t>
+            </a:r>
+            <a:endParaRPr lang="en-US" sz="1550" dirty="0"/>
+          </a:p>
+          <a:p>
+            <a:pPr marL="177800" indent="-177800">
+              <a:lnSpc>
+                <a:spcPct val="105000"/>
+              </a:lnSpc>
+              <a:spcAft>
+                <a:spcPts val="400"/>
+              </a:spcAft>
+              <a:buSzPct val="100000"/>
+              <a:buChar char="•"/>
+            </a:pPr>
+            <a:r>
+              <a:rPr lang="en-US" sz="1550" dirty="0">
+                <a:solidFill>
+                  <a:srgbClr val="1E293B"/>
+                </a:solidFill>
+                <a:latin typeface="Prompt" pitchFamily="34" charset="0"/>
+                <a:ea typeface="Prompt" pitchFamily="34" charset="-122"/>
+                <a:cs typeface="Prompt" pitchFamily="34" charset="-120"/>
+              </a:rPr>
+              <a:t>เหมาะกับข้อมูลที่ไม่เปิดเผย</a:t>
+            </a:r>
+            <a:endParaRPr lang="en-US" sz="1550" dirty="0"/>
+          </a:p>
+        </p:txBody>
+      </p:sp>
+      <p:sp>
+        <p:nvSpPr>
+          <p:cNvPr id="13" name="Shape 11"/>
+          <p:cNvSpPr/>
+          <p:nvPr/>
+        </p:nvSpPr>
+        <p:spPr>
+          <a:xfrm>
+            <a:off x="548640" y="5394960"/>
+            <a:ext cx="11094415" cy="777240"/>
+          </a:xfrm>
+          <a:prstGeom prst="roundRect">
+            <a:avLst>
+              <a:gd name="adj" fmla="val 11765"/>
+            </a:avLst>
+          </a:prstGeom>
+          <a:solidFill>
+            <a:srgbClr val="E3F1EE"/>
+          </a:solidFill>
+          <a:ln w="9525">
+            <a:solidFill>
+              <a:srgbClr val="E3F1EE"/>
+            </a:solidFill>
+            <a:prstDash val="solid"/>
+          </a:ln>
+        </p:spPr>
+        <p:txBody>
+          <a:bodyPr/>
+          <a:p/>
+        </p:txBody>
+      </p:sp>
+      <p:sp>
+        <p:nvSpPr>
+          <p:cNvPr id="14" name="Text 12"/>
+          <p:cNvSpPr txBox="1"/>
+          <p:nvPr/>
+        </p:nvSpPr>
+        <p:spPr>
+          <a:xfrm>
+            <a:off x="749808" y="5577840"/>
+            <a:ext cx="10692079" cy="457200"/>
+          </a:xfrm>
+          <a:prstGeom prst="rect">
+            <a:avLst/>
+          </a:prstGeom>
+          <a:noFill/>
+          <a:ln/>
+        </p:spPr>
+        <p:txBody>
+          <a:bodyPr wrap="square" lIns="0" tIns="0" rIns="0" bIns="0" rtlCol="0" anchor="t"/>
+          <a:lstStyle/>
+          <a:p>
+            <a:pPr indent="0" marL="0">
+              <a:lnSpc>
+                <a:spcPct val="105000"/>
+              </a:lnSpc>
+              <a:spcAft>
+                <a:spcPts val="400"/>
+              </a:spcAft>
+              <a:buNone/>
+            </a:pPr>
+            <a:r>
+              <a:rPr lang="en-US" sz="1500" dirty="0">
+                <a:solidFill>
+                  <a:srgbClr val="1E293B"/>
+                </a:solidFill>
+                <a:latin typeface="Prompt" pitchFamily="34" charset="0"/>
+                <a:ea typeface="Prompt" pitchFamily="34" charset="-122"/>
+                <a:cs typeface="Prompt" pitchFamily="34" charset="-120"/>
+              </a:rPr>
+              <a:t>ทุกทางเลือกใช้ชุดเครื่องมือ ArcGIS Pro และแบบจำลองเดียวกัน ต่างกันที่ที่เก็บผลลัพธ์และผู้ที่เข้าถึงได้</a:t>
+            </a:r>
+            <a:endParaRPr lang="en-US" sz="1500" dirty="0"/>
+          </a:p>
+        </p:txBody>
+      </p:sp>
+      <p:sp>
+        <p:nvSpPr>
+          <p:cNvPr id="25" name="Slide Number Placeholder 0"/>
+          <p:cNvSpPr>
+            <a:spLocks noGrp="1"/>
+          </p:cNvSpPr>
+          <p:nvPr>
+            <p:ph type="sldNum" sz="quarter" idx="4294967295"/>
+          </p:nvPr>
+        </p:nvSpPr>
+        <p:spPr>
+          <a:xfrm>
+            <a:off x="11277295" y="6419088"/>
+            <a:ext cx="457200" cy="274320"/>
+          </a:xfrm>
+          <a:prstGeom prst="rect">
+            <a:avLst/>
+          </a:prstGeom>
+          <a:extLst>
+            <a:ext uri="{C572A759-6A51-4108-AA02-DFA0A04FC94B}">
+              <ma14:wrappingTextBoxFlag xmlns:ma14="http://schemas.microsoft.com/office/mac/drawingml/2011/main" val="0"/>
+            </a:ext>
+          </a:extLst>
+        </p:spPr>
+        <p:txBody>
+          <a:bodyPr/>
+          <a:lstStyle>
+            <a:lvl1pPr>
+              <a:defRPr sz="900">
+                <a:solidFill>
+                  <a:srgbClr val="64748B"/>
+                </a:solidFill>
+                <a:latin typeface="Prompt"/>
+                <a:ea typeface="Prompt"/>
+                <a:cs typeface="Prompt"/>
+              </a:defRPr>
+            </a:lvl1pPr>
+          </a:lstStyle>
+          <a:p>
+            <a:pPr algn="r"/>
+            <a:fld id="{F7021451-1387-4CA6-816F-3879F97B5CBC}" type="slidenum">
+              <a:rPr b="0" lang="en-US"/>
+              <a:t>9</a:t>
+            </a:fld>
+            <a:endParaRPr lang="en-US"/>
+          </a:p>
+        </p:txBody>
+      </p:sp>
+    </p:spTree>
+  </p:cSld>
+  <p:clrMapOvr>
+    <a:masterClrMapping/>
+  </p:clrMapOvr>
+</p:sld>
+</file>
+
+<file path=ppt/slides/slide11.xml><?xml version="1.0" encoding="utf-8"?>
 <p:sld xmlns:a="http://schemas.openxmlformats.org/drawingml/2006/main" xmlns:r="http://schemas.openxmlformats.org/officeDocument/2006/relationships" xmlns:p="http://schemas.openxmlformats.org/presentationml/2006/main">
   <p:cSld name="Slide 10">
     <p:bg>
@@ -4312,6 +5115,10 @@
             <a:prstDash val="solid"/>
           </a:ln>
         </p:spPr>
+        <p:txBody>
+          <a:bodyPr/>
+          <a:p/>
+        </p:txBody>
       </p:sp>
       <p:sp>
         <p:nvSpPr>
@@ -4337,6 +5144,10 @@
             <a:prstDash val="solid"/>
           </a:ln>
         </p:spPr>
+        <p:txBody>
+          <a:bodyPr/>
+          <a:p/>
+        </p:txBody>
       </p:sp>
       <p:sp>
         <p:nvSpPr>
@@ -4487,6 +5298,10 @@
             <a:prstDash val="solid"/>
           </a:ln>
         </p:spPr>
+        <p:txBody>
+          <a:bodyPr/>
+          <a:p/>
+        </p:txBody>
       </p:sp>
       <p:sp>
         <p:nvSpPr>
@@ -4512,6 +5327,10 @@
             <a:prstDash val="solid"/>
           </a:ln>
         </p:spPr>
+        <p:txBody>
+          <a:bodyPr/>
+          <a:p/>
+        </p:txBody>
       </p:sp>
       <p:sp>
         <p:nvSpPr>
@@ -4662,6 +5481,10 @@
             <a:prstDash val="solid"/>
           </a:ln>
         </p:spPr>
+        <p:txBody>
+          <a:bodyPr/>
+          <a:p/>
+        </p:txBody>
       </p:sp>
       <p:sp>
         <p:nvSpPr>
@@ -4687,6 +5510,10 @@
             <a:prstDash val="solid"/>
           </a:ln>
         </p:spPr>
+        <p:txBody>
+          <a:bodyPr/>
+          <a:p/>
+        </p:txBody>
       </p:sp>
       <p:sp>
         <p:nvSpPr>
@@ -4837,6 +5664,10 @@
             <a:prstDash val="solid"/>
           </a:ln>
         </p:spPr>
+        <p:txBody>
+          <a:bodyPr/>
+          <a:p/>
+        </p:txBody>
       </p:sp>
       <p:sp>
         <p:nvSpPr>
@@ -4862,6 +5693,10 @@
             <a:prstDash val="solid"/>
           </a:ln>
         </p:spPr>
+        <p:txBody>
+          <a:bodyPr/>
+          <a:p/>
+        </p:txBody>
       </p:sp>
       <p:sp>
         <p:nvSpPr>
@@ -5042,7 +5877,7 @@
 </p:sld>
 </file>
 
-<file path=ppt/slides/slide11.xml><?xml version="1.0" encoding="utf-8"?>
+<file path=ppt/slides/slide12.xml><?xml version="1.0" encoding="utf-8"?>
 <p:sld xmlns:a="http://schemas.openxmlformats.org/drawingml/2006/main" xmlns:r="http://schemas.openxmlformats.org/officeDocument/2006/relationships" xmlns:p="http://schemas.openxmlformats.org/presentationml/2006/main">
   <p:cSld name="Slide 11">
     <p:bg>
@@ -5348,6 +6183,10 @@
             <a:prstDash val="solid"/>
           </a:ln>
         </p:spPr>
+        <p:txBody>
+          <a:bodyPr/>
+          <a:p/>
+        </p:txBody>
       </p:sp>
       <p:sp>
         <p:nvSpPr>
@@ -5375,6 +6214,10 @@
             <a:prstDash val="solid"/>
           </a:ln>
         </p:spPr>
+        <p:txBody>
+          <a:bodyPr/>
+          <a:p/>
+        </p:txBody>
       </p:sp>
       <p:sp>
         <p:nvSpPr>
@@ -5400,6 +6243,10 @@
             <a:prstDash val="solid"/>
           </a:ln>
         </p:spPr>
+        <p:txBody>
+          <a:bodyPr/>
+          <a:p/>
+        </p:txBody>
       </p:sp>
       <p:sp>
         <p:nvSpPr>
@@ -5545,6 +6392,10 @@
             <a:prstDash val="solid"/>
           </a:ln>
         </p:spPr>
+        <p:txBody>
+          <a:bodyPr/>
+          <a:p/>
+        </p:txBody>
       </p:sp>
       <p:sp>
         <p:nvSpPr>
@@ -5572,6 +6423,10 @@
             <a:prstDash val="solid"/>
           </a:ln>
         </p:spPr>
+        <p:txBody>
+          <a:bodyPr/>
+          <a:p/>
+        </p:txBody>
       </p:sp>
       <p:sp>
         <p:nvSpPr>
@@ -5597,6 +6452,10 @@
             <a:prstDash val="solid"/>
           </a:ln>
         </p:spPr>
+        <p:txBody>
+          <a:bodyPr/>
+          <a:p/>
+        </p:txBody>
       </p:sp>
       <p:sp>
         <p:nvSpPr>
@@ -5742,6 +6601,10 @@
             <a:prstDash val="solid"/>
           </a:ln>
         </p:spPr>
+        <p:txBody>
+          <a:bodyPr/>
+          <a:p/>
+        </p:txBody>
       </p:sp>
       <p:sp>
         <p:nvSpPr>
@@ -5769,6 +6632,10 @@
             <a:prstDash val="solid"/>
           </a:ln>
         </p:spPr>
+        <p:txBody>
+          <a:bodyPr/>
+          <a:p/>
+        </p:txBody>
       </p:sp>
       <p:sp>
         <p:nvSpPr>
@@ -5794,6 +6661,10 @@
             <a:prstDash val="solid"/>
           </a:ln>
         </p:spPr>
+        <p:txBody>
+          <a:bodyPr/>
+          <a:p/>
+        </p:txBody>
       </p:sp>
       <p:sp>
         <p:nvSpPr>
@@ -5941,6 +6812,10 @@
             <a:prstDash val="solid"/>
           </a:ln>
         </p:spPr>
+        <p:txBody>
+          <a:bodyPr/>
+          <a:p/>
+        </p:txBody>
       </p:sp>
       <p:sp>
         <p:nvSpPr>
@@ -6082,7 +6957,7 @@
 </p:sld>
 </file>
 
-<file path=ppt/slides/slide12.xml><?xml version="1.0" encoding="utf-8"?>
+<file path=ppt/slides/slide13.xml><?xml version="1.0" encoding="utf-8"?>
 <p:sld xmlns:a="http://schemas.openxmlformats.org/drawingml/2006/main" xmlns:r="http://schemas.openxmlformats.org/officeDocument/2006/relationships" xmlns:p="http://schemas.openxmlformats.org/presentationml/2006/main">
   <p:cSld name="Slide 12">
     <p:bg>
@@ -6256,6 +7131,10 @@
             </a:outerShdw>
           </a:effectLst>
         </p:spPr>
+        <p:txBody>
+          <a:bodyPr/>
+          <a:p/>
+        </p:txBody>
       </p:sp>
       <p:pic>
         <p:nvPicPr>
@@ -6288,16 +7167,9 @@
 </p:sld>
 </file>
 
-<file path=ppt/slides/slide13.xml><?xml version="1.0" encoding="utf-8"?>
+<file path=ppt/slides/slide14.xml><?xml version="1.0" encoding="utf-8"?>
 <p:sld xmlns:a="http://schemas.openxmlformats.org/drawingml/2006/main" xmlns:p="http://schemas.openxmlformats.org/presentationml/2006/main" xmlns:r="http://schemas.openxmlformats.org/officeDocument/2006/relationships">
   <p:cSld>
-    <p:bg>
-      <p:bgPr>
-        <a:solidFill>
-          <a:srgbClr val="FFFFFF"/>
-        </a:solidFill>
-      </p:bgPr>
-    </p:bg>
     <p:spTree>
       <p:nvGrpSpPr>
         <p:cNvPr id="1" name=""/>
@@ -6370,22 +7242,20 @@
           <a:noFill/>
         </p:spPr>
         <p:txBody>
-          <a:bodyPr wrap="square" lIns="0" rIns="0" tIns="0" bIns="0" anchor="t">
+          <a:bodyPr wrap="square" anchor="t">
             <a:spAutoFit/>
           </a:bodyPr>
           <a:lstStyle/>
           <a:p>
             <a:pPr algn="l"/>
             <a:r>
-              <a:rPr sz="1200" b="1" i="0">
+              <a:rPr sz="1200" b="1">
                 <a:solidFill>
                   <a:srgbClr val="1B998B"/>
                 </a:solidFill>
                 <a:latin typeface="Prompt"/>
-                <a:ea typeface="Prompt"/>
-                <a:cs typeface="Prompt"/>
-              </a:rPr>
-              <a:t>พิสูจน์กับน้ำท่วมจริง</a:t>
+              </a:rPr>
+              <a:t>ขยายผลทั้งจังหวัด</a:t>
             </a:r>
           </a:p>
         </p:txBody>
@@ -6407,48 +7277,44 @@
           <a:noFill/>
         </p:spPr>
         <p:txBody>
-          <a:bodyPr wrap="square" lIns="0" rIns="0" tIns="0" bIns="0" anchor="ctr">
+          <a:bodyPr wrap="square" anchor="t">
             <a:spAutoFit/>
           </a:bodyPr>
           <a:lstStyle/>
           <a:p>
             <a:pPr algn="l"/>
             <a:r>
-              <a:rPr sz="2600" b="1" i="0">
+              <a:rPr sz="2400" b="1">
                 <a:solidFill>
                   <a:srgbClr val="0B3C5D"/>
                 </a:solidFill>
                 <a:latin typeface="Prompt"/>
-                <a:ea typeface="Prompt"/>
-                <a:cs typeface="Prompt"/>
-              </a:rPr>
-              <a:t>ตัวอย่างแอ่งท่าตะโก: แบบจำลองตรงกับภาพดาวเทียมย้อนหลัง</a:t>
-            </a:r>
-          </a:p>
-        </p:txBody>
-      </p:sp>
-      <p:sp>
-        <p:nvSpPr>
-          <p:cNvPr id="28" name="Rounded Rectangle 27"/>
+              </a:rPr>
+              <a:t>ทั้งจังหวัด: ประวัติน้ำท่วม 9 ปี + สถานการณ์พายุใหญ่ + พยากรณ์อัตโนมัติ</a:t>
+            </a:r>
+          </a:p>
+        </p:txBody>
+      </p:sp>
+      <p:sp>
+        <p:nvSpPr>
+          <p:cNvPr id="28" name="Rectangle 27"/>
           <p:cNvSpPr/>
           <p:nvPr/>
         </p:nvSpPr>
         <p:spPr>
           <a:xfrm>
-            <a:off x="493776" y="1426464"/>
-            <a:ext cx="4956048" cy="4352544"/>
-          </a:xfrm>
-          <a:prstGeom prst="roundRect">
-            <a:avLst>
-              <a:gd name="adj" fmla="val 1600"/>
-            </a:avLst>
+            <a:off x="493776" y="1829966"/>
+            <a:ext cx="5230368" cy="3600403"/>
+          </a:xfrm>
+          <a:prstGeom prst="rect">
+            <a:avLst/>
           </a:prstGeom>
           <a:solidFill>
             <a:srgbClr val="FFFFFF"/>
           </a:solidFill>
           <a:ln w="9525">
             <a:solidFill>
-              <a:srgbClr val="D5DEE6"/>
+              <a:srgbClr val="D7E0E8"/>
             </a:solidFill>
           </a:ln>
           <a:effectLst/>
@@ -6470,12 +7336,14 @@
         <p:txBody>
           <a:bodyPr rtlCol="0" anchor="ctr"/>
           <a:lstStyle/>
-          <a:p/>
+          <a:p>
+            <a:pPr algn="ctr"/>
+          </a:p>
         </p:txBody>
       </p:sp>
       <p:pic>
         <p:nvPicPr>
-          <p:cNvPr id="29" name="Picture 28" descr="map_ev2025.png"/>
+          <p:cNvPr id="29" name="Picture 28" descr="prov_scnE.png"/>
           <p:cNvPicPr>
             <a:picLocks noChangeAspect="1"/>
           </p:cNvPicPr>
@@ -6489,8 +7357,8 @@
         </p:blipFill>
         <p:spPr>
           <a:xfrm>
-            <a:off x="548640" y="1481328"/>
-            <a:ext cx="4846320" cy="4242816"/>
+            <a:off x="548640" y="1884830"/>
+            <a:ext cx="5120640" cy="3490675"/>
           </a:xfrm>
           <a:prstGeom prst="rect">
             <a:avLst/>
@@ -6505,50 +7373,46 @@
         </p:nvSpPr>
         <p:spPr>
           <a:xfrm>
-            <a:off x="548640" y="5797296"/>
-            <a:ext cx="4846320" cy="457200"/>
-          </a:xfrm>
-          <a:prstGeom prst="rect">
-            <a:avLst/>
-          </a:prstGeom>
-          <a:noFill/>
-        </p:spPr>
-        <p:txBody>
-          <a:bodyPr wrap="square" lIns="0" rIns="0" tIns="0" bIns="0" anchor="t">
+            <a:off x="548640" y="5852160"/>
+            <a:ext cx="5120640" cy="457200"/>
+          </a:xfrm>
+          <a:prstGeom prst="rect">
+            <a:avLst/>
+          </a:prstGeom>
+          <a:noFill/>
+        </p:spPr>
+        <p:txBody>
+          <a:bodyPr wrap="square" anchor="t">
             <a:spAutoFit/>
           </a:bodyPr>
           <a:lstStyle/>
           <a:p>
             <a:pPr algn="l"/>
             <a:r>
-              <a:rPr sz="1050" b="0" i="0">
+              <a:rPr sz="1050" b="0">
                 <a:solidFill>
                   <a:srgbClr val="64748B"/>
                 </a:solidFill>
                 <a:latin typeface="Prompt"/>
-                <a:ea typeface="Prompt"/>
-                <a:cs typeface="Prompt"/>
-              </a:rPr>
-              <a:t>ปี 2568: พื้นที่ท่วมนาน 30 วันขึ้นไป — น้ำเงิน = แบบจำลองกับดาวเทียมตรงกัน</a:t>
-            </a:r>
-          </a:p>
-        </p:txBody>
-      </p:sp>
-      <p:sp>
-        <p:nvSpPr>
-          <p:cNvPr id="31" name="Rounded Rectangle 30"/>
+              </a:rPr>
+              <a:t>สถานการณ์พายุใหญ่ (ฝน 250 มม./5 วัน + แม่น้ำล้นตลิ่ง): เวลาที่น้ำลด</a:t>
+            </a:r>
+          </a:p>
+        </p:txBody>
+      </p:sp>
+      <p:sp>
+        <p:nvSpPr>
+          <p:cNvPr id="31" name="Rectangle 30"/>
           <p:cNvSpPr/>
           <p:nvPr/>
         </p:nvSpPr>
         <p:spPr>
           <a:xfrm>
-            <a:off x="5760720" y="1481328"/>
-            <a:ext cx="1874519" cy="1463040"/>
-          </a:xfrm>
-          <a:prstGeom prst="roundRect">
-            <a:avLst>
-              <a:gd name="adj" fmla="val 6000"/>
-            </a:avLst>
+            <a:off x="5943600" y="1481328"/>
+            <a:ext cx="1783080" cy="1463040"/>
+          </a:xfrm>
+          <a:prstGeom prst="rect">
+            <a:avLst/>
           </a:prstGeom>
           <a:solidFill>
             <a:srgbClr val="EEF5F9"/>
@@ -6575,7 +7439,9 @@
         <p:txBody>
           <a:bodyPr rtlCol="0" anchor="ctr"/>
           <a:lstStyle/>
-          <a:p/>
+          <a:p>
+            <a:pPr algn="ctr"/>
+          </a:p>
         </p:txBody>
       </p:sp>
       <p:sp>
@@ -6586,42 +7452,38 @@
         </p:nvSpPr>
         <p:spPr>
           <a:xfrm>
-            <a:off x="5961888" y="1609344"/>
-            <a:ext cx="1508760" cy="658368"/>
-          </a:xfrm>
-          <a:prstGeom prst="rect">
-            <a:avLst/>
-          </a:prstGeom>
-          <a:noFill/>
-        </p:spPr>
-        <p:txBody>
-          <a:bodyPr wrap="square" lIns="0" rIns="0" tIns="0" bIns="0" anchor="ctr">
+            <a:off x="6108192" y="1572768"/>
+            <a:ext cx="1508760" cy="640080"/>
+          </a:xfrm>
+          <a:prstGeom prst="rect">
+            <a:avLst/>
+          </a:prstGeom>
+          <a:noFill/>
+        </p:spPr>
+        <p:txBody>
+          <a:bodyPr wrap="square" anchor="t">
             <a:spAutoFit/>
           </a:bodyPr>
           <a:lstStyle/>
           <a:p>
             <a:pPr algn="l"/>
             <a:r>
-              <a:rPr sz="2800" b="1" i="0">
+              <a:rPr sz="2600" b="1">
                 <a:solidFill>
                   <a:srgbClr val="0B3C5D"/>
                 </a:solidFill>
                 <a:latin typeface="Prompt"/>
-                <a:ea typeface="Prompt"/>
-                <a:cs typeface="Prompt"/>
-              </a:rPr>
-              <a:t>9</a:t>
-            </a:r>
-            <a:r>
-              <a:rPr sz="1300" b="0" i="0">
+              </a:rPr>
+              <a:t>502</a:t>
+            </a:r>
+            <a:r>
+              <a:rPr sz="1100" b="0">
                 <a:solidFill>
                   <a:srgbClr val="64748B"/>
                 </a:solidFill>
                 <a:latin typeface="Prompt"/>
-                <a:ea typeface="Prompt"/>
-                <a:cs typeface="Prompt"/>
-              </a:rPr>
-              <a:t>  ปี</a:t>
+              </a:rPr>
+              <a:t>  ตร.กม.</a:t>
             </a:r>
           </a:p>
         </p:txBody>
@@ -6634,50 +7496,46 @@
         </p:nvSpPr>
         <p:spPr>
           <a:xfrm>
-            <a:off x="5961888" y="2296972"/>
-            <a:ext cx="1508760" cy="658368"/>
-          </a:xfrm>
-          <a:prstGeom prst="rect">
-            <a:avLst/>
-          </a:prstGeom>
-          <a:noFill/>
-        </p:spPr>
-        <p:txBody>
-          <a:bodyPr wrap="square" lIns="0" rIns="0" tIns="0" bIns="0" anchor="t">
+            <a:off x="6108192" y="2194560"/>
+            <a:ext cx="1508760" cy="685800"/>
+          </a:xfrm>
+          <a:prstGeom prst="rect">
+            <a:avLst/>
+          </a:prstGeom>
+          <a:noFill/>
+        </p:spPr>
+        <p:txBody>
+          <a:bodyPr wrap="square" anchor="t">
             <a:spAutoFit/>
           </a:bodyPr>
           <a:lstStyle/>
           <a:p>
             <a:pPr algn="l"/>
             <a:r>
-              <a:rPr sz="1150" b="0" i="0">
+              <a:rPr sz="1150" b="0">
                 <a:solidFill>
                   <a:srgbClr val="1E293B"/>
                 </a:solidFill>
                 <a:latin typeface="Prompt"/>
-                <a:ea typeface="Prompt"/>
-                <a:cs typeface="Prompt"/>
-              </a:rPr>
-              <a:t>ภาพเรดาร์ย้อนหลัง 148 ภาพ มองทะลุเมฆ</a:t>
-            </a:r>
-          </a:p>
-        </p:txBody>
-      </p:sp>
-      <p:sp>
-        <p:nvSpPr>
-          <p:cNvPr id="34" name="Rounded Rectangle 33"/>
+              </a:rPr>
+              <a:t>ท่วมนานซ้ำซาก (ดาวเทียม 9 ปี)</a:t>
+            </a:r>
+          </a:p>
+        </p:txBody>
+      </p:sp>
+      <p:sp>
+        <p:nvSpPr>
+          <p:cNvPr id="34" name="Rectangle 33"/>
           <p:cNvSpPr/>
           <p:nvPr/>
         </p:nvSpPr>
         <p:spPr>
           <a:xfrm>
-            <a:off x="7763256" y="1481328"/>
-            <a:ext cx="1874519" cy="1463040"/>
-          </a:xfrm>
-          <a:prstGeom prst="roundRect">
-            <a:avLst>
-              <a:gd name="adj" fmla="val 6000"/>
-            </a:avLst>
+            <a:off x="7863840" y="1481328"/>
+            <a:ext cx="1783080" cy="1463040"/>
+          </a:xfrm>
+          <a:prstGeom prst="rect">
+            <a:avLst/>
           </a:prstGeom>
           <a:solidFill>
             <a:srgbClr val="EEF5F9"/>
@@ -6704,7 +7562,9 @@
         <p:txBody>
           <a:bodyPr rtlCol="0" anchor="ctr"/>
           <a:lstStyle/>
-          <a:p/>
+          <a:p>
+            <a:pPr algn="ctr"/>
+          </a:p>
         </p:txBody>
       </p:sp>
       <p:sp>
@@ -6715,42 +7575,38 @@
         </p:nvSpPr>
         <p:spPr>
           <a:xfrm>
-            <a:off x="7964424" y="1609344"/>
-            <a:ext cx="1508760" cy="658368"/>
-          </a:xfrm>
-          <a:prstGeom prst="rect">
-            <a:avLst/>
-          </a:prstGeom>
-          <a:noFill/>
-        </p:spPr>
-        <p:txBody>
-          <a:bodyPr wrap="square" lIns="0" rIns="0" tIns="0" bIns="0" anchor="ctr">
+            <a:off x="8028431" y="1572768"/>
+            <a:ext cx="1508760" cy="640080"/>
+          </a:xfrm>
+          <a:prstGeom prst="rect">
+            <a:avLst/>
+          </a:prstGeom>
+          <a:noFill/>
+        </p:spPr>
+        <p:txBody>
+          <a:bodyPr wrap="square" anchor="t">
             <a:spAutoFit/>
           </a:bodyPr>
           <a:lstStyle/>
           <a:p>
             <a:pPr algn="l"/>
             <a:r>
-              <a:rPr sz="2800" b="1" i="0">
+              <a:rPr sz="2600" b="1">
                 <a:solidFill>
                   <a:srgbClr val="D64545"/>
                 </a:solidFill>
                 <a:latin typeface="Prompt"/>
-                <a:ea typeface="Prompt"/>
-                <a:cs typeface="Prompt"/>
-              </a:rPr>
-              <a:t>2–3</a:t>
-            </a:r>
-            <a:r>
-              <a:rPr sz="1300" b="0" i="0">
+              </a:rPr>
+              <a:t>608</a:t>
+            </a:r>
+            <a:r>
+              <a:rPr sz="1100" b="0">
                 <a:solidFill>
                   <a:srgbClr val="64748B"/>
                 </a:solidFill>
                 <a:latin typeface="Prompt"/>
-                <a:ea typeface="Prompt"/>
-                <a:cs typeface="Prompt"/>
-              </a:rPr>
-              <a:t>  เดือน</a:t>
+              </a:rPr>
+              <a:t>  ตร.กม.</a:t>
             </a:r>
           </a:p>
         </p:txBody>
@@ -6763,50 +7619,46 @@
         </p:nvSpPr>
         <p:spPr>
           <a:xfrm>
-            <a:off x="7964424" y="2296972"/>
-            <a:ext cx="1508760" cy="658368"/>
-          </a:xfrm>
-          <a:prstGeom prst="rect">
-            <a:avLst/>
-          </a:prstGeom>
-          <a:noFill/>
-        </p:spPr>
-        <p:txBody>
-          <a:bodyPr wrap="square" lIns="0" rIns="0" tIns="0" bIns="0" anchor="t">
+            <a:off x="8028431" y="2194560"/>
+            <a:ext cx="1508760" cy="685800"/>
+          </a:xfrm>
+          <a:prstGeom prst="rect">
+            <a:avLst/>
+          </a:prstGeom>
+          <a:noFill/>
+        </p:spPr>
+        <p:txBody>
+          <a:bodyPr wrap="square" anchor="t">
             <a:spAutoFit/>
           </a:bodyPr>
           <a:lstStyle/>
           <a:p>
             <a:pPr algn="l"/>
             <a:r>
-              <a:rPr sz="1150" b="0" i="0">
+              <a:rPr sz="1150" b="0">
                 <a:solidFill>
                   <a:srgbClr val="1E293B"/>
                 </a:solidFill>
                 <a:latin typeface="Prompt"/>
-                <a:ea typeface="Prompt"/>
-                <a:cs typeface="Prompt"/>
-              </a:rPr>
-              <a:t>น้ำขังรอบบึงบอระเพ็ด ตรงกับที่ชาวบ้านเล่า</a:t>
-            </a:r>
-          </a:p>
-        </p:txBody>
-      </p:sp>
-      <p:sp>
-        <p:nvSpPr>
-          <p:cNvPr id="37" name="Rounded Rectangle 36"/>
+              </a:rPr>
+              <a:t>ขังเกิน 1 สัปดาห์ เมื่อพายุใหญ่</a:t>
+            </a:r>
+          </a:p>
+        </p:txBody>
+      </p:sp>
+      <p:sp>
+        <p:nvSpPr>
+          <p:cNvPr id="37" name="Rectangle 36"/>
           <p:cNvSpPr/>
           <p:nvPr/>
         </p:nvSpPr>
         <p:spPr>
           <a:xfrm>
-            <a:off x="9765792" y="1481328"/>
-            <a:ext cx="1874519" cy="1463040"/>
-          </a:xfrm>
-          <a:prstGeom prst="roundRect">
-            <a:avLst>
-              <a:gd name="adj" fmla="val 6000"/>
-            </a:avLst>
+            <a:off x="9784080" y="1481328"/>
+            <a:ext cx="1856231" cy="1463040"/>
+          </a:xfrm>
+          <a:prstGeom prst="rect">
+            <a:avLst/>
           </a:prstGeom>
           <a:solidFill>
             <a:srgbClr val="EEF5F9"/>
@@ -6833,7 +7685,9 @@
         <p:txBody>
           <a:bodyPr rtlCol="0" anchor="ctr"/>
           <a:lstStyle/>
-          <a:p/>
+          <a:p>
+            <a:pPr algn="ctr"/>
+          </a:p>
         </p:txBody>
       </p:sp>
       <p:sp>
@@ -6844,42 +7698,38 @@
         </p:nvSpPr>
         <p:spPr>
           <a:xfrm>
-            <a:off x="9966960" y="1609344"/>
-            <a:ext cx="1508760" cy="658368"/>
-          </a:xfrm>
-          <a:prstGeom prst="rect">
-            <a:avLst/>
-          </a:prstGeom>
-          <a:noFill/>
-        </p:spPr>
-        <p:txBody>
-          <a:bodyPr wrap="square" lIns="0" rIns="0" tIns="0" bIns="0" anchor="ctr">
+            <a:off x="9948672" y="1572768"/>
+            <a:ext cx="1581911" cy="640080"/>
+          </a:xfrm>
+          <a:prstGeom prst="rect">
+            <a:avLst/>
+          </a:prstGeom>
+          <a:noFill/>
+        </p:spPr>
+        <p:txBody>
+          <a:bodyPr wrap="square" anchor="t">
             <a:spAutoFit/>
           </a:bodyPr>
           <a:lstStyle/>
           <a:p>
             <a:pPr algn="l"/>
             <a:r>
-              <a:rPr sz="2800" b="1" i="0">
+              <a:rPr sz="2600" b="1">
                 <a:solidFill>
                   <a:srgbClr val="1B998B"/>
                 </a:solidFill>
                 <a:latin typeface="Prompt"/>
-                <a:ea typeface="Prompt"/>
-                <a:cs typeface="Prompt"/>
-              </a:rPr>
-              <a:t>~0.5</a:t>
-            </a:r>
-            <a:r>
-              <a:rPr sz="1300" b="0" i="0">
+              </a:rPr>
+              <a:t>4</a:t>
+            </a:r>
+            <a:r>
+              <a:rPr sz="1100" b="0">
                 <a:solidFill>
                   <a:srgbClr val="64748B"/>
                 </a:solidFill>
                 <a:latin typeface="Prompt"/>
-                <a:ea typeface="Prompt"/>
-                <a:cs typeface="Prompt"/>
-              </a:rPr>
-              <a:t>  CSI</a:t>
+              </a:rPr>
+              <a:t>  รอบ/วัน</a:t>
             </a:r>
           </a:p>
         </p:txBody>
@@ -6892,50 +7742,46 @@
         </p:nvSpPr>
         <p:spPr>
           <a:xfrm>
-            <a:off x="9966960" y="2296972"/>
-            <a:ext cx="1508760" cy="658368"/>
-          </a:xfrm>
-          <a:prstGeom prst="rect">
-            <a:avLst/>
-          </a:prstGeom>
-          <a:noFill/>
-        </p:spPr>
-        <p:txBody>
-          <a:bodyPr wrap="square" lIns="0" rIns="0" tIns="0" bIns="0" anchor="t">
+            <a:off x="9948672" y="2194560"/>
+            <a:ext cx="1581911" cy="685800"/>
+          </a:xfrm>
+          <a:prstGeom prst="rect">
+            <a:avLst/>
+          </a:prstGeom>
+          <a:noFill/>
+        </p:spPr>
+        <p:txBody>
+          <a:bodyPr wrap="square" anchor="t">
             <a:spAutoFit/>
           </a:bodyPr>
           <a:lstStyle/>
           <a:p>
             <a:pPr algn="l"/>
             <a:r>
-              <a:rPr sz="1150" b="0" i="0">
+              <a:rPr sz="1150" b="0">
                 <a:solidFill>
                   <a:srgbClr val="1E293B"/>
                 </a:solidFill>
                 <a:latin typeface="Prompt"/>
-                <a:ea typeface="Prompt"/>
-                <a:cs typeface="Prompt"/>
-              </a:rPr>
-              <a:t>ความแม่นยำเชิงพื้นที่ 3 เหตุการณ์</a:t>
-            </a:r>
-          </a:p>
-        </p:txBody>
-      </p:sp>
-      <p:sp>
-        <p:nvSpPr>
-          <p:cNvPr id="40" name="Rounded Rectangle 39"/>
+              </a:rPr>
+              <a:t>พยากรณ์ 72 ชม. ทั้งจังหวัด</a:t>
+            </a:r>
+          </a:p>
+        </p:txBody>
+      </p:sp>
+      <p:sp>
+        <p:nvSpPr>
+          <p:cNvPr id="40" name="Rectangle 39"/>
           <p:cNvSpPr/>
           <p:nvPr/>
         </p:nvSpPr>
         <p:spPr>
           <a:xfrm>
-            <a:off x="5760720" y="3108960"/>
-            <a:ext cx="5879592" cy="1600200"/>
-          </a:xfrm>
-          <a:prstGeom prst="roundRect">
-            <a:avLst>
-              <a:gd name="adj" fmla="val 6000"/>
-            </a:avLst>
+            <a:off x="5943600" y="3108960"/>
+            <a:ext cx="5696712" cy="1554480"/>
+          </a:xfrm>
+          <a:prstGeom prst="rect">
+            <a:avLst/>
           </a:prstGeom>
           <a:solidFill>
             <a:srgbClr val="EEF5F9"/>
@@ -6962,7 +7808,9 @@
         <p:txBody>
           <a:bodyPr rtlCol="0" anchor="ctr"/>
           <a:lstStyle/>
-          <a:p/>
+          <a:p>
+            <a:pPr algn="ctr"/>
+          </a:p>
         </p:txBody>
       </p:sp>
       <p:sp>
@@ -6973,31 +7821,29 @@
         </p:nvSpPr>
         <p:spPr>
           <a:xfrm>
-            <a:off x="5961888" y="3218688"/>
-            <a:ext cx="5486400" cy="365760"/>
-          </a:xfrm>
-          <a:prstGeom prst="rect">
-            <a:avLst/>
-          </a:prstGeom>
-          <a:noFill/>
-        </p:spPr>
-        <p:txBody>
-          <a:bodyPr wrap="square" lIns="0" rIns="0" tIns="0" bIns="0" anchor="t">
+            <a:off x="6126480" y="3200400"/>
+            <a:ext cx="5330952" cy="365760"/>
+          </a:xfrm>
+          <a:prstGeom prst="rect">
+            <a:avLst/>
+          </a:prstGeom>
+          <a:noFill/>
+        </p:spPr>
+        <p:txBody>
+          <a:bodyPr wrap="square" anchor="t">
             <a:spAutoFit/>
           </a:bodyPr>
           <a:lstStyle/>
           <a:p>
             <a:pPr algn="l"/>
             <a:r>
-              <a:rPr sz="1400" b="1" i="0">
+              <a:rPr sz="1400" b="1">
                 <a:solidFill>
                   <a:srgbClr val="0B3C5D"/>
                 </a:solidFill>
                 <a:latin typeface="Prompt"/>
-                <a:ea typeface="Prompt"/>
-                <a:cs typeface="Prompt"/>
-              </a:rPr>
-              <a:t>สิ่งที่ได้จากการวิเคราะห์</a:t>
+              </a:rPr>
+              <a:t>ใช้ทำอะไรได้</a:t>
             </a:r>
           </a:p>
         </p:txBody>
@@ -7010,73 +7856,66 @@
         </p:nvSpPr>
         <p:spPr>
           <a:xfrm>
-            <a:off x="5961888" y="3611880"/>
-            <a:ext cx="5486400" cy="1051560"/>
-          </a:xfrm>
-          <a:prstGeom prst="rect">
-            <a:avLst/>
-          </a:prstGeom>
-          <a:noFill/>
-        </p:spPr>
-        <p:txBody>
-          <a:bodyPr wrap="square" lIns="0" rIns="0" tIns="0" bIns="0" anchor="t">
+            <a:off x="6126480" y="3566160"/>
+            <a:ext cx="5330952" cy="1051560"/>
+          </a:xfrm>
+          <a:prstGeom prst="rect">
+            <a:avLst/>
+          </a:prstGeom>
+          <a:noFill/>
+        </p:spPr>
+        <p:txBody>
+          <a:bodyPr wrap="square" anchor="t">
             <a:spAutoFit/>
           </a:bodyPr>
           <a:lstStyle/>
           <a:p>
-            <a:pPr algn="l" marL="228600" indent="-228600">
-              <a:buFont typeface="Arial"/>
-              <a:buChar char="•"/>
-            </a:pPr>
-            <a:r>
-              <a:rPr sz="1200" b="0" i="0">
+            <a:pPr algn="l">
+              <a:spcAft>
+                <a:spcPts val="400"/>
+              </a:spcAft>
+            </a:pPr>
+            <a:r>
+              <a:rPr sz="1200" b="0">
                 <a:solidFill>
                   <a:srgbClr val="1E293B"/>
                 </a:solidFill>
                 <a:latin typeface="Prompt"/>
-                <a:ea typeface="Prompt"/>
-                <a:cs typeface="Prompt"/>
-              </a:rPr>
-              <a:t>พื้นที่ที่ท่วมซ้ำทุกปีน้ำมาก: ทับกฤช วังมหากร พนมเศษ พระนอน</a:t>
-            </a:r>
-          </a:p>
-          <a:p>
-            <a:pPr algn="l" marL="228600" indent="-228600">
-              <a:spcBef>
-                <a:spcPts val="300"/>
-              </a:spcBef>
-              <a:buFont typeface="Arial"/>
-              <a:buChar char="•"/>
-            </a:pPr>
-            <a:r>
-              <a:rPr sz="1200" b="0" i="0">
+              </a:rPr>
+              <a:t>จัดลำดับตำบลที่ต้องเตรียมเครื่องสูบ เรือ จุดอพยพ ก่อนฤดูน้ำหลาก</a:t>
+            </a:r>
+          </a:p>
+          <a:p>
+            <a:pPr algn="l">
+              <a:spcAft>
+                <a:spcPts val="400"/>
+              </a:spcAft>
+            </a:pPr>
+            <a:r>
+              <a:rPr sz="1200" b="0">
                 <a:solidFill>
                   <a:srgbClr val="1E293B"/>
                 </a:solidFill>
                 <a:latin typeface="Prompt"/>
-                <a:ea typeface="Prompt"/>
-                <a:cs typeface="Prompt"/>
-              </a:rPr>
-              <a:t>จำลองพื้นที่ท่วมนานได้ใกล้ของจริง (ต่างไม่เกิน ~20%)</a:t>
-            </a:r>
-          </a:p>
-        </p:txBody>
-      </p:sp>
-      <p:sp>
-        <p:nvSpPr>
-          <p:cNvPr id="43" name="Rounded Rectangle 42"/>
+              </a:rPr>
+              <a:t>ติดตามรายวันว่าพื้นที่ใดจะท่วมเพิ่มใน 3 วัน ทั้ง 15 อำเภอ</a:t>
+            </a:r>
+          </a:p>
+        </p:txBody>
+      </p:sp>
+      <p:sp>
+        <p:nvSpPr>
+          <p:cNvPr id="43" name="Rectangle 42"/>
           <p:cNvSpPr/>
           <p:nvPr/>
         </p:nvSpPr>
         <p:spPr>
           <a:xfrm>
-            <a:off x="5760720" y="4846320"/>
-            <a:ext cx="5879592" cy="1417320"/>
-          </a:xfrm>
-          <a:prstGeom prst="roundRect">
-            <a:avLst>
-              <a:gd name="adj" fmla="val 6000"/>
-            </a:avLst>
+            <a:off x="5943600" y="4800600"/>
+            <a:ext cx="5696712" cy="1463040"/>
+          </a:xfrm>
+          <a:prstGeom prst="rect">
+            <a:avLst/>
           </a:prstGeom>
           <a:solidFill>
             <a:srgbClr val="FFF4E5"/>
@@ -7103,7 +7942,9 @@
         <p:txBody>
           <a:bodyPr rtlCol="0" anchor="ctr"/>
           <a:lstStyle/>
-          <a:p/>
+          <a:p>
+            <a:pPr algn="ctr"/>
+          </a:p>
         </p:txBody>
       </p:sp>
       <p:sp>
@@ -7114,31 +7955,29 @@
         </p:nvSpPr>
         <p:spPr>
           <a:xfrm>
-            <a:off x="5961888" y="4937760"/>
-            <a:ext cx="5486400" cy="365760"/>
-          </a:xfrm>
-          <a:prstGeom prst="rect">
-            <a:avLst/>
-          </a:prstGeom>
-          <a:noFill/>
-        </p:spPr>
-        <p:txBody>
-          <a:bodyPr wrap="square" lIns="0" rIns="0" tIns="0" bIns="0" anchor="t">
+            <a:off x="6126480" y="4892040"/>
+            <a:ext cx="5330952" cy="365760"/>
+          </a:xfrm>
+          <a:prstGeom prst="rect">
+            <a:avLst/>
+          </a:prstGeom>
+          <a:noFill/>
+        </p:spPr>
+        <p:txBody>
+          <a:bodyPr wrap="square" anchor="t">
             <a:spAutoFit/>
           </a:bodyPr>
           <a:lstStyle/>
           <a:p>
             <a:pPr algn="l"/>
             <a:r>
-              <a:rPr sz="1400" b="1" i="0">
+              <a:rPr sz="1400" b="1">
                 <a:solidFill>
                   <a:srgbClr val="0B3C5D"/>
                 </a:solidFill>
                 <a:latin typeface="Prompt"/>
-                <a:ea typeface="Prompt"/>
-                <a:cs typeface="Prompt"/>
-              </a:rPr>
-              <a:t>นัยต่อการบริหารน้ำ</a:t>
+              </a:rPr>
+              <a:t>ความน่าเชื่อถือ</a:t>
             </a:r>
           </a:p>
         </p:txBody>
@@ -7151,31 +7990,29 @@
         </p:nvSpPr>
         <p:spPr>
           <a:xfrm>
-            <a:off x="5961888" y="5321808"/>
-            <a:ext cx="5486400" cy="914400"/>
-          </a:xfrm>
-          <a:prstGeom prst="rect">
-            <a:avLst/>
-          </a:prstGeom>
-          <a:noFill/>
-        </p:spPr>
-        <p:txBody>
-          <a:bodyPr wrap="square" lIns="0" rIns="0" tIns="0" bIns="0" anchor="t">
+            <a:off x="6126480" y="5257800"/>
+            <a:ext cx="5330952" cy="960120"/>
+          </a:xfrm>
+          <a:prstGeom prst="rect">
+            <a:avLst/>
+          </a:prstGeom>
+          <a:noFill/>
+        </p:spPr>
+        <p:txBody>
+          <a:bodyPr wrap="square" anchor="t">
             <a:spAutoFit/>
           </a:bodyPr>
           <a:lstStyle/>
           <a:p>
             <a:pPr algn="l"/>
             <a:r>
-              <a:rPr sz="1200" b="0" i="0">
+              <a:rPr sz="1200" b="0">
                 <a:solidFill>
                   <a:srgbClr val="1E293B"/>
                 </a:solidFill>
                 <a:latin typeface="Prompt"/>
-                <a:ea typeface="Prompt"/>
-                <a:cs typeface="Prompt"/>
-              </a:rPr>
-              <a:t>ท่วมนานเพราะน้ำจากแม่น้ำเข้าบึงผ่านคลองและประตูน้ำ ก่อนระดับน้ำถึงตลิ่ง → จัดการที่ประตูน้ำ/คลองตรงจุดได้ผลกว่าเฝ้าดูแค่ระดับตลิ่ง</a:t>
+              </a:rPr>
+              <a:t>ตรวจกับภาพดาวเทียม 4 ปี CSI 0.31–0.41 (ดีที่สุดในลุ่มน่าน–บึงบอระเพ็ด) ; ฝั่งขวาแม่น้ำปิงต้องการข้อมูลประตูน้ำจาก ชป.</a:t>
             </a:r>
           </a:p>
         </p:txBody>
@@ -7197,22 +8034,20 @@
           <a:noFill/>
         </p:spPr>
         <p:txBody>
-          <a:bodyPr wrap="square" lIns="0" rIns="0" tIns="0" bIns="0" anchor="t">
+          <a:bodyPr wrap="square" anchor="t">
             <a:spAutoFit/>
           </a:bodyPr>
           <a:lstStyle/>
           <a:p>
             <a:pPr algn="l"/>
             <a:r>
-              <a:rPr sz="900" b="0" i="0">
+              <a:rPr sz="900" b="0">
                 <a:solidFill>
                   <a:srgbClr val="64748B"/>
                 </a:solidFill>
                 <a:latin typeface="Prompt"/>
-                <a:ea typeface="Prompt"/>
-                <a:cs typeface="Prompt"/>
-              </a:rPr>
-              <a:t>Sentinel-1 (Copernicus) ผ่าน Microsoft Planetary Computer · ระดับน้ำจริง ThaiWater (สสน.) · ฝน ERA5 · CSI = พื้นที่ตรงกัน ÷ (ตรงกัน + ขาด + เกิน)</a:t>
+              </a:rPr>
+              <a:t>ที่มา: Sentinel-1 RTC (Copernicus ผ่าน Microsoft Planetary Computer) วงโคจร 62 + 172 · แบบจำลอง 2D 300 ม. (event_2d.py / scenario_prov.py / run_province.py)</a:t>
             </a:r>
           </a:p>
         </p:txBody>
@@ -7353,6 +8188,10 @@
             <a:prstDash val="solid"/>
           </a:ln>
         </p:spPr>
+        <p:txBody>
+          <a:bodyPr/>
+          <a:p/>
+        </p:txBody>
       </p:sp>
       <p:sp>
         <p:nvSpPr>
@@ -7378,6 +8217,10 @@
             <a:prstDash val="solid"/>
           </a:ln>
         </p:spPr>
+        <p:txBody>
+          <a:bodyPr/>
+          <a:p/>
+        </p:txBody>
       </p:sp>
       <p:sp>
         <p:nvSpPr>
@@ -7528,6 +8371,10 @@
             <a:prstDash val="solid"/>
           </a:ln>
         </p:spPr>
+        <p:txBody>
+          <a:bodyPr/>
+          <a:p/>
+        </p:txBody>
       </p:sp>
       <p:sp>
         <p:nvSpPr>
@@ -7553,6 +8400,10 @@
             <a:prstDash val="solid"/>
           </a:ln>
         </p:spPr>
+        <p:txBody>
+          <a:bodyPr/>
+          <a:p/>
+        </p:txBody>
       </p:sp>
       <p:sp>
         <p:nvSpPr>
@@ -7703,6 +8554,10 @@
             <a:prstDash val="solid"/>
           </a:ln>
         </p:spPr>
+        <p:txBody>
+          <a:bodyPr/>
+          <a:p/>
+        </p:txBody>
       </p:sp>
       <p:sp>
         <p:nvSpPr>
@@ -7728,6 +8583,10 @@
             <a:prstDash val="solid"/>
           </a:ln>
         </p:spPr>
+        <p:txBody>
+          <a:bodyPr/>
+          <a:p/>
+        </p:txBody>
       </p:sp>
       <p:sp>
         <p:nvSpPr>
@@ -7878,6 +8737,10 @@
             <a:prstDash val="solid"/>
           </a:ln>
         </p:spPr>
+        <p:txBody>
+          <a:bodyPr/>
+          <a:p/>
+        </p:txBody>
       </p:sp>
       <p:sp>
         <p:nvSpPr>
@@ -7903,6 +8766,10 @@
             <a:prstDash val="solid"/>
           </a:ln>
         </p:spPr>
+        <p:txBody>
+          <a:bodyPr/>
+          <a:p/>
+        </p:txBody>
       </p:sp>
       <p:sp>
         <p:nvSpPr>
@@ -8211,6 +9078,10 @@
             <a:prstDash val="solid"/>
           </a:ln>
         </p:spPr>
+        <p:txBody>
+          <a:bodyPr/>
+          <a:p/>
+        </p:txBody>
       </p:sp>
       <p:sp>
         <p:nvSpPr>
@@ -8236,6 +9107,10 @@
             <a:prstDash val="solid"/>
           </a:ln>
         </p:spPr>
+        <p:txBody>
+          <a:bodyPr/>
+          <a:p/>
+        </p:txBody>
       </p:sp>
       <p:sp>
         <p:nvSpPr>
@@ -8381,6 +9256,10 @@
             <a:prstDash val="solid"/>
           </a:ln>
         </p:spPr>
+        <p:txBody>
+          <a:bodyPr/>
+          <a:p/>
+        </p:txBody>
       </p:sp>
       <p:sp>
         <p:nvSpPr>
@@ -8408,6 +9287,10 @@
             <a:prstDash val="solid"/>
           </a:ln>
         </p:spPr>
+        <p:txBody>
+          <a:bodyPr/>
+          <a:p/>
+        </p:txBody>
       </p:sp>
       <p:sp>
         <p:nvSpPr>
@@ -8433,6 +9316,10 @@
             <a:prstDash val="solid"/>
           </a:ln>
         </p:spPr>
+        <p:txBody>
+          <a:bodyPr/>
+          <a:p/>
+        </p:txBody>
       </p:sp>
       <p:sp>
         <p:nvSpPr>
@@ -8578,6 +9465,10 @@
             <a:prstDash val="solid"/>
           </a:ln>
         </p:spPr>
+        <p:txBody>
+          <a:bodyPr/>
+          <a:p/>
+        </p:txBody>
       </p:sp>
       <p:sp>
         <p:nvSpPr>
@@ -8605,6 +9496,10 @@
             <a:prstDash val="solid"/>
           </a:ln>
         </p:spPr>
+        <p:txBody>
+          <a:bodyPr/>
+          <a:p/>
+        </p:txBody>
       </p:sp>
       <p:sp>
         <p:nvSpPr>
@@ -8630,6 +9525,10 @@
             <a:prstDash val="solid"/>
           </a:ln>
         </p:spPr>
+        <p:txBody>
+          <a:bodyPr/>
+          <a:p/>
+        </p:txBody>
       </p:sp>
       <p:sp>
         <p:nvSpPr>
@@ -8775,6 +9674,10 @@
             <a:prstDash val="solid"/>
           </a:ln>
         </p:spPr>
+        <p:txBody>
+          <a:bodyPr/>
+          <a:p/>
+        </p:txBody>
       </p:sp>
       <p:sp>
         <p:nvSpPr>
@@ -8802,6 +9705,10 @@
             <a:prstDash val="solid"/>
           </a:ln>
         </p:spPr>
+        <p:txBody>
+          <a:bodyPr/>
+          <a:p/>
+        </p:txBody>
       </p:sp>
       <p:sp>
         <p:nvSpPr>
@@ -8827,6 +9734,10 @@
             <a:prstDash val="solid"/>
           </a:ln>
         </p:spPr>
+        <p:txBody>
+          <a:bodyPr/>
+          <a:p/>
+        </p:txBody>
       </p:sp>
       <p:sp>
         <p:nvSpPr>
@@ -8974,6 +9885,10 @@
             <a:prstDash val="solid"/>
           </a:ln>
         </p:spPr>
+        <p:txBody>
+          <a:bodyPr/>
+          <a:p/>
+        </p:txBody>
       </p:sp>
       <p:sp>
         <p:nvSpPr>
@@ -9250,6 +10165,10 @@
             </a:outerShdw>
           </a:effectLst>
         </p:spPr>
+        <p:txBody>
+          <a:bodyPr/>
+          <a:p/>
+        </p:txBody>
       </p:sp>
       <p:pic>
         <p:nvPicPr>
@@ -9298,6 +10217,10 @@
             <a:prstDash val="solid"/>
           </a:ln>
         </p:spPr>
+        <p:txBody>
+          <a:bodyPr/>
+          <a:p/>
+        </p:txBody>
       </p:sp>
       <p:sp>
         <p:nvSpPr>
@@ -9418,6 +10341,10 @@
             <a:prstDash val="solid"/>
           </a:ln>
         </p:spPr>
+        <p:txBody>
+          <a:bodyPr/>
+          <a:p/>
+        </p:txBody>
       </p:sp>
       <p:sp>
         <p:nvSpPr>
@@ -9538,6 +10465,10 @@
             <a:prstDash val="solid"/>
           </a:ln>
         </p:spPr>
+        <p:txBody>
+          <a:bodyPr/>
+          <a:p/>
+        </p:txBody>
       </p:sp>
       <p:sp>
         <p:nvSpPr>
@@ -9658,6 +10589,10 @@
             <a:prstDash val="solid"/>
           </a:ln>
         </p:spPr>
+        <p:txBody>
+          <a:bodyPr/>
+          <a:p/>
+        </p:txBody>
       </p:sp>
       <p:sp>
         <p:nvSpPr>
@@ -9778,6 +10713,10 @@
             <a:prstDash val="solid"/>
           </a:ln>
         </p:spPr>
+        <p:txBody>
+          <a:bodyPr/>
+          <a:p/>
+        </p:txBody>
       </p:sp>
       <p:sp>
         <p:nvSpPr>
@@ -10058,6 +10997,10 @@
             <a:prstDash val="solid"/>
           </a:ln>
         </p:spPr>
+        <p:txBody>
+          <a:bodyPr/>
+          <a:p/>
+        </p:txBody>
       </p:sp>
       <p:sp>
         <p:nvSpPr>
@@ -10177,6 +11120,10 @@
             <a:prstDash val="solid"/>
           </a:ln>
         </p:spPr>
+        <p:txBody>
+          <a:bodyPr/>
+          <a:p/>
+        </p:txBody>
       </p:sp>
       <p:sp>
         <p:nvSpPr>
@@ -10296,6 +11243,10 @@
             <a:prstDash val="solid"/>
           </a:ln>
         </p:spPr>
+        <p:txBody>
+          <a:bodyPr/>
+          <a:p/>
+        </p:txBody>
       </p:sp>
       <p:sp>
         <p:nvSpPr>
@@ -10404,6 +11355,10 @@
             <a:prstDash val="solid"/>
           </a:ln>
         </p:spPr>
+        <p:txBody>
+          <a:bodyPr/>
+          <a:p/>
+        </p:txBody>
       </p:sp>
       <p:sp>
         <p:nvSpPr>
@@ -10528,6 +11483,10 @@
             <a:prstDash val="solid"/>
           </a:ln>
         </p:spPr>
+        <p:txBody>
+          <a:bodyPr/>
+          <a:p/>
+        </p:txBody>
       </p:sp>
       <p:sp>
         <p:nvSpPr>
@@ -10909,6 +11868,943 @@
 </file>
 
 <file path=ppt/slides/slide7.xml><?xml version="1.0" encoding="utf-8"?>
+<p:sld xmlns:a="http://schemas.openxmlformats.org/drawingml/2006/main" xmlns:p="http://schemas.openxmlformats.org/presentationml/2006/main" xmlns:r="http://schemas.openxmlformats.org/officeDocument/2006/relationships">
+  <p:cSld>
+    <p:bg>
+      <p:bgPr>
+        <a:solidFill>
+          <a:srgbClr val="FFFFFF"/>
+        </a:solidFill>
+      </p:bgPr>
+    </p:bg>
+    <p:spTree>
+      <p:nvGrpSpPr>
+        <p:cNvPr id="1" name=""/>
+        <p:cNvGrpSpPr/>
+        <p:nvPr/>
+      </p:nvGrpSpPr>
+      <p:grpSpPr/>
+      <p:sp>
+        <p:nvSpPr>
+          <p:cNvPr id="25" name="Slide Number Placeholder 0"/>
+          <p:cNvSpPr>
+            <a:spLocks noGrp="1"/>
+          </p:cNvSpPr>
+          <p:nvPr>
+            <p:ph type="sldNum" sz="quarter" idx="4294967295"/>
+          </p:nvPr>
+        </p:nvSpPr>
+        <p:spPr>
+          <a:xfrm>
+            <a:off x="11277295" y="6419088"/>
+            <a:ext cx="457200" cy="274320"/>
+          </a:xfrm>
+          <a:prstGeom prst="rect">
+            <a:avLst/>
+          </a:prstGeom>
+          <a:extLst>
+            <a:ext uri="{C572A759-6A51-4108-AA02-DFA0A04FC94B}">
+              <ma14:wrappingTextBoxFlag xmlns:ma14="http://schemas.microsoft.com/office/mac/drawingml/2011/main" val="0"/>
+            </a:ext>
+          </a:extLst>
+        </p:spPr>
+        <p:txBody>
+          <a:bodyPr/>
+          <a:lstStyle>
+            <a:lvl1pPr>
+              <a:defRPr sz="900">
+                <a:solidFill>
+                  <a:srgbClr val="64748B"/>
+                </a:solidFill>
+                <a:latin typeface="Prompt"/>
+                <a:ea typeface="Prompt"/>
+                <a:cs typeface="Prompt"/>
+              </a:defRPr>
+            </a:lvl1pPr>
+          </a:lstStyle>
+          <a:p>
+            <a:pPr algn="r"/>
+            <a:fld id="{F7021451-1387-4CA6-816F-3879F97B5CBC}" type="slidenum">
+              <a:rPr b="0" lang="en-US"/>
+              <a:t>2</a:t>
+            </a:fld>
+            <a:endParaRPr lang="en-US"/>
+          </a:p>
+        </p:txBody>
+      </p:sp>
+      <p:sp>
+        <p:nvSpPr>
+          <p:cNvPr id="26" name="TextBox 25"/>
+          <p:cNvSpPr txBox="1"/>
+          <p:nvPr/>
+        </p:nvSpPr>
+        <p:spPr>
+          <a:xfrm>
+            <a:off x="548640" y="347472"/>
+            <a:ext cx="8229600" cy="274320"/>
+          </a:xfrm>
+          <a:prstGeom prst="rect">
+            <a:avLst/>
+          </a:prstGeom>
+          <a:noFill/>
+        </p:spPr>
+        <p:txBody>
+          <a:bodyPr wrap="square" lIns="0" rIns="0" tIns="0" bIns="0" anchor="t">
+            <a:spAutoFit/>
+          </a:bodyPr>
+          <a:lstStyle/>
+          <a:p>
+            <a:pPr algn="l"/>
+            <a:r>
+              <a:rPr sz="1200" b="1" i="0">
+                <a:solidFill>
+                  <a:srgbClr val="1B998B"/>
+                </a:solidFill>
+                <a:latin typeface="Prompt"/>
+                <a:ea typeface="Prompt"/>
+                <a:cs typeface="Prompt"/>
+              </a:rPr>
+              <a:t>พิสูจน์กับน้ำท่วมจริง</a:t>
+            </a:r>
+          </a:p>
+        </p:txBody>
+      </p:sp>
+      <p:sp>
+        <p:nvSpPr>
+          <p:cNvPr id="27" name="TextBox 26"/>
+          <p:cNvSpPr txBox="1"/>
+          <p:nvPr/>
+        </p:nvSpPr>
+        <p:spPr>
+          <a:xfrm>
+            <a:off x="548640" y="621792"/>
+            <a:ext cx="11091672" cy="685800"/>
+          </a:xfrm>
+          <a:prstGeom prst="rect">
+            <a:avLst/>
+          </a:prstGeom>
+          <a:noFill/>
+        </p:spPr>
+        <p:txBody>
+          <a:bodyPr wrap="square" lIns="0" rIns="0" tIns="0" bIns="0" anchor="ctr">
+            <a:spAutoFit/>
+          </a:bodyPr>
+          <a:lstStyle/>
+          <a:p>
+            <a:pPr algn="l"/>
+            <a:r>
+              <a:rPr sz="2600" b="1" i="0">
+                <a:solidFill>
+                  <a:srgbClr val="0B3C5D"/>
+                </a:solidFill>
+                <a:latin typeface="Prompt"/>
+                <a:ea typeface="Prompt"/>
+                <a:cs typeface="Prompt"/>
+              </a:rPr>
+              <a:t>ตัวอย่างแอ่งท่าตะโก: แบบจำลองตรงกับภาพดาวเทียมย้อนหลัง</a:t>
+            </a:r>
+          </a:p>
+        </p:txBody>
+      </p:sp>
+      <p:sp>
+        <p:nvSpPr>
+          <p:cNvPr id="28" name="Rounded Rectangle 27"/>
+          <p:cNvSpPr/>
+          <p:nvPr/>
+        </p:nvSpPr>
+        <p:spPr>
+          <a:xfrm>
+            <a:off x="493776" y="1426464"/>
+            <a:ext cx="4956048" cy="4352544"/>
+          </a:xfrm>
+          <a:prstGeom prst="roundRect">
+            <a:avLst>
+              <a:gd name="adj" fmla="val 1600"/>
+            </a:avLst>
+          </a:prstGeom>
+          <a:solidFill>
+            <a:srgbClr val="FFFFFF"/>
+          </a:solidFill>
+          <a:ln w="9525">
+            <a:solidFill>
+              <a:srgbClr val="D5DEE6"/>
+            </a:solidFill>
+          </a:ln>
+          <a:effectLst/>
+        </p:spPr>
+        <p:style>
+          <a:lnRef idx="1">
+            <a:schemeClr val="accent1"/>
+          </a:lnRef>
+          <a:fillRef idx="3">
+            <a:schemeClr val="accent1"/>
+          </a:fillRef>
+          <a:effectRef idx="2">
+            <a:schemeClr val="accent1"/>
+          </a:effectRef>
+          <a:fontRef idx="minor">
+            <a:schemeClr val="lt1"/>
+          </a:fontRef>
+        </p:style>
+        <p:txBody>
+          <a:bodyPr rtlCol="0" anchor="ctr"/>
+          <a:lstStyle/>
+          <a:p/>
+        </p:txBody>
+      </p:sp>
+      <p:pic>
+        <p:nvPicPr>
+          <p:cNvPr id="29" name="Picture 28" descr="map_ev2025.png"/>
+          <p:cNvPicPr>
+            <a:picLocks noChangeAspect="1"/>
+          </p:cNvPicPr>
+          <p:nvPr/>
+        </p:nvPicPr>
+        <p:blipFill>
+          <a:blip r:embed="rId2"/>
+          <a:stretch>
+            <a:fillRect/>
+          </a:stretch>
+        </p:blipFill>
+        <p:spPr>
+          <a:xfrm>
+            <a:off x="548640" y="1481328"/>
+            <a:ext cx="4846320" cy="4242816"/>
+          </a:xfrm>
+          <a:prstGeom prst="rect">
+            <a:avLst/>
+          </a:prstGeom>
+        </p:spPr>
+      </p:pic>
+      <p:sp>
+        <p:nvSpPr>
+          <p:cNvPr id="30" name="TextBox 29"/>
+          <p:cNvSpPr txBox="1"/>
+          <p:nvPr/>
+        </p:nvSpPr>
+        <p:spPr>
+          <a:xfrm>
+            <a:off x="548640" y="5797296"/>
+            <a:ext cx="4846320" cy="457200"/>
+          </a:xfrm>
+          <a:prstGeom prst="rect">
+            <a:avLst/>
+          </a:prstGeom>
+          <a:noFill/>
+        </p:spPr>
+        <p:txBody>
+          <a:bodyPr wrap="square" lIns="0" rIns="0" tIns="0" bIns="0" anchor="t">
+            <a:spAutoFit/>
+          </a:bodyPr>
+          <a:lstStyle/>
+          <a:p>
+            <a:pPr algn="l"/>
+            <a:r>
+              <a:rPr sz="1050" b="0" i="0">
+                <a:solidFill>
+                  <a:srgbClr val="64748B"/>
+                </a:solidFill>
+                <a:latin typeface="Prompt"/>
+                <a:ea typeface="Prompt"/>
+                <a:cs typeface="Prompt"/>
+              </a:rPr>
+              <a:t>ปี 2568: พื้นที่ท่วมนาน 30 วันขึ้นไป — น้ำเงิน = แบบจำลองกับดาวเทียมตรงกัน</a:t>
+            </a:r>
+          </a:p>
+        </p:txBody>
+      </p:sp>
+      <p:sp>
+        <p:nvSpPr>
+          <p:cNvPr id="31" name="Rounded Rectangle 30"/>
+          <p:cNvSpPr/>
+          <p:nvPr/>
+        </p:nvSpPr>
+        <p:spPr>
+          <a:xfrm>
+            <a:off x="5760720" y="1481328"/>
+            <a:ext cx="1874519" cy="1463040"/>
+          </a:xfrm>
+          <a:prstGeom prst="roundRect">
+            <a:avLst>
+              <a:gd name="adj" fmla="val 6000"/>
+            </a:avLst>
+          </a:prstGeom>
+          <a:solidFill>
+            <a:srgbClr val="EEF5F9"/>
+          </a:solidFill>
+          <a:ln>
+            <a:noFill/>
+          </a:ln>
+          <a:effectLst/>
+        </p:spPr>
+        <p:style>
+          <a:lnRef idx="1">
+            <a:schemeClr val="accent1"/>
+          </a:lnRef>
+          <a:fillRef idx="3">
+            <a:schemeClr val="accent1"/>
+          </a:fillRef>
+          <a:effectRef idx="2">
+            <a:schemeClr val="accent1"/>
+          </a:effectRef>
+          <a:fontRef idx="minor">
+            <a:schemeClr val="lt1"/>
+          </a:fontRef>
+        </p:style>
+        <p:txBody>
+          <a:bodyPr rtlCol="0" anchor="ctr"/>
+          <a:lstStyle/>
+          <a:p/>
+        </p:txBody>
+      </p:sp>
+      <p:sp>
+        <p:nvSpPr>
+          <p:cNvPr id="32" name="TextBox 31"/>
+          <p:cNvSpPr txBox="1"/>
+          <p:nvPr/>
+        </p:nvSpPr>
+        <p:spPr>
+          <a:xfrm>
+            <a:off x="5961888" y="1609344"/>
+            <a:ext cx="1508760" cy="658368"/>
+          </a:xfrm>
+          <a:prstGeom prst="rect">
+            <a:avLst/>
+          </a:prstGeom>
+          <a:noFill/>
+        </p:spPr>
+        <p:txBody>
+          <a:bodyPr wrap="square" lIns="0" rIns="0" tIns="0" bIns="0" anchor="ctr">
+            <a:spAutoFit/>
+          </a:bodyPr>
+          <a:lstStyle/>
+          <a:p>
+            <a:pPr algn="l"/>
+            <a:r>
+              <a:rPr sz="2800" b="1" i="0">
+                <a:solidFill>
+                  <a:srgbClr val="0B3C5D"/>
+                </a:solidFill>
+                <a:latin typeface="Prompt"/>
+                <a:ea typeface="Prompt"/>
+                <a:cs typeface="Prompt"/>
+              </a:rPr>
+              <a:t>9</a:t>
+            </a:r>
+            <a:r>
+              <a:rPr sz="1300" b="0" i="0">
+                <a:solidFill>
+                  <a:srgbClr val="64748B"/>
+                </a:solidFill>
+                <a:latin typeface="Prompt"/>
+                <a:ea typeface="Prompt"/>
+                <a:cs typeface="Prompt"/>
+              </a:rPr>
+              <a:t>  ปี</a:t>
+            </a:r>
+          </a:p>
+        </p:txBody>
+      </p:sp>
+      <p:sp>
+        <p:nvSpPr>
+          <p:cNvPr id="33" name="TextBox 32"/>
+          <p:cNvSpPr txBox="1"/>
+          <p:nvPr/>
+        </p:nvSpPr>
+        <p:spPr>
+          <a:xfrm>
+            <a:off x="5961888" y="2296972"/>
+            <a:ext cx="1508760" cy="658368"/>
+          </a:xfrm>
+          <a:prstGeom prst="rect">
+            <a:avLst/>
+          </a:prstGeom>
+          <a:noFill/>
+        </p:spPr>
+        <p:txBody>
+          <a:bodyPr wrap="square" lIns="0" rIns="0" tIns="0" bIns="0" anchor="t">
+            <a:spAutoFit/>
+          </a:bodyPr>
+          <a:lstStyle/>
+          <a:p>
+            <a:pPr algn="l"/>
+            <a:r>
+              <a:rPr sz="1150" b="0" i="0">
+                <a:solidFill>
+                  <a:srgbClr val="1E293B"/>
+                </a:solidFill>
+                <a:latin typeface="Prompt"/>
+                <a:ea typeface="Prompt"/>
+                <a:cs typeface="Prompt"/>
+              </a:rPr>
+              <a:t>ภาพเรดาร์ย้อนหลัง 148 ภาพ มองทะลุเมฆ</a:t>
+            </a:r>
+          </a:p>
+        </p:txBody>
+      </p:sp>
+      <p:sp>
+        <p:nvSpPr>
+          <p:cNvPr id="34" name="Rounded Rectangle 33"/>
+          <p:cNvSpPr/>
+          <p:nvPr/>
+        </p:nvSpPr>
+        <p:spPr>
+          <a:xfrm>
+            <a:off x="7763256" y="1481328"/>
+            <a:ext cx="1874519" cy="1463040"/>
+          </a:xfrm>
+          <a:prstGeom prst="roundRect">
+            <a:avLst>
+              <a:gd name="adj" fmla="val 6000"/>
+            </a:avLst>
+          </a:prstGeom>
+          <a:solidFill>
+            <a:srgbClr val="EEF5F9"/>
+          </a:solidFill>
+          <a:ln>
+            <a:noFill/>
+          </a:ln>
+          <a:effectLst/>
+        </p:spPr>
+        <p:style>
+          <a:lnRef idx="1">
+            <a:schemeClr val="accent1"/>
+          </a:lnRef>
+          <a:fillRef idx="3">
+            <a:schemeClr val="accent1"/>
+          </a:fillRef>
+          <a:effectRef idx="2">
+            <a:schemeClr val="accent1"/>
+          </a:effectRef>
+          <a:fontRef idx="minor">
+            <a:schemeClr val="lt1"/>
+          </a:fontRef>
+        </p:style>
+        <p:txBody>
+          <a:bodyPr rtlCol="0" anchor="ctr"/>
+          <a:lstStyle/>
+          <a:p/>
+        </p:txBody>
+      </p:sp>
+      <p:sp>
+        <p:nvSpPr>
+          <p:cNvPr id="35" name="TextBox 34"/>
+          <p:cNvSpPr txBox="1"/>
+          <p:nvPr/>
+        </p:nvSpPr>
+        <p:spPr>
+          <a:xfrm>
+            <a:off x="7964424" y="1609344"/>
+            <a:ext cx="1508760" cy="658368"/>
+          </a:xfrm>
+          <a:prstGeom prst="rect">
+            <a:avLst/>
+          </a:prstGeom>
+          <a:noFill/>
+        </p:spPr>
+        <p:txBody>
+          <a:bodyPr wrap="square" lIns="0" rIns="0" tIns="0" bIns="0" anchor="ctr">
+            <a:spAutoFit/>
+          </a:bodyPr>
+          <a:lstStyle/>
+          <a:p>
+            <a:pPr algn="l"/>
+            <a:r>
+              <a:rPr sz="2800" b="1" i="0">
+                <a:solidFill>
+                  <a:srgbClr val="D64545"/>
+                </a:solidFill>
+                <a:latin typeface="Prompt"/>
+                <a:ea typeface="Prompt"/>
+                <a:cs typeface="Prompt"/>
+              </a:rPr>
+              <a:t>2–3</a:t>
+            </a:r>
+            <a:r>
+              <a:rPr sz="1300" b="0" i="0">
+                <a:solidFill>
+                  <a:srgbClr val="64748B"/>
+                </a:solidFill>
+                <a:latin typeface="Prompt"/>
+                <a:ea typeface="Prompt"/>
+                <a:cs typeface="Prompt"/>
+              </a:rPr>
+              <a:t>  เดือน</a:t>
+            </a:r>
+          </a:p>
+        </p:txBody>
+      </p:sp>
+      <p:sp>
+        <p:nvSpPr>
+          <p:cNvPr id="36" name="TextBox 35"/>
+          <p:cNvSpPr txBox="1"/>
+          <p:nvPr/>
+        </p:nvSpPr>
+        <p:spPr>
+          <a:xfrm>
+            <a:off x="7964424" y="2296972"/>
+            <a:ext cx="1508760" cy="658368"/>
+          </a:xfrm>
+          <a:prstGeom prst="rect">
+            <a:avLst/>
+          </a:prstGeom>
+          <a:noFill/>
+        </p:spPr>
+        <p:txBody>
+          <a:bodyPr wrap="square" lIns="0" rIns="0" tIns="0" bIns="0" anchor="t">
+            <a:spAutoFit/>
+          </a:bodyPr>
+          <a:lstStyle/>
+          <a:p>
+            <a:pPr algn="l"/>
+            <a:r>
+              <a:rPr sz="1150" b="0" i="0">
+                <a:solidFill>
+                  <a:srgbClr val="1E293B"/>
+                </a:solidFill>
+                <a:latin typeface="Prompt"/>
+                <a:ea typeface="Prompt"/>
+                <a:cs typeface="Prompt"/>
+              </a:rPr>
+              <a:t>น้ำขังรอบบึงบอระเพ็ด ตรงกับที่ชาวบ้านเล่า</a:t>
+            </a:r>
+          </a:p>
+        </p:txBody>
+      </p:sp>
+      <p:sp>
+        <p:nvSpPr>
+          <p:cNvPr id="37" name="Rounded Rectangle 36"/>
+          <p:cNvSpPr/>
+          <p:nvPr/>
+        </p:nvSpPr>
+        <p:spPr>
+          <a:xfrm>
+            <a:off x="9765792" y="1481328"/>
+            <a:ext cx="1874519" cy="1463040"/>
+          </a:xfrm>
+          <a:prstGeom prst="roundRect">
+            <a:avLst>
+              <a:gd name="adj" fmla="val 6000"/>
+            </a:avLst>
+          </a:prstGeom>
+          <a:solidFill>
+            <a:srgbClr val="EEF5F9"/>
+          </a:solidFill>
+          <a:ln>
+            <a:noFill/>
+          </a:ln>
+          <a:effectLst/>
+        </p:spPr>
+        <p:style>
+          <a:lnRef idx="1">
+            <a:schemeClr val="accent1"/>
+          </a:lnRef>
+          <a:fillRef idx="3">
+            <a:schemeClr val="accent1"/>
+          </a:fillRef>
+          <a:effectRef idx="2">
+            <a:schemeClr val="accent1"/>
+          </a:effectRef>
+          <a:fontRef idx="minor">
+            <a:schemeClr val="lt1"/>
+          </a:fontRef>
+        </p:style>
+        <p:txBody>
+          <a:bodyPr rtlCol="0" anchor="ctr"/>
+          <a:lstStyle/>
+          <a:p/>
+        </p:txBody>
+      </p:sp>
+      <p:sp>
+        <p:nvSpPr>
+          <p:cNvPr id="38" name="TextBox 37"/>
+          <p:cNvSpPr txBox="1"/>
+          <p:nvPr/>
+        </p:nvSpPr>
+        <p:spPr>
+          <a:xfrm>
+            <a:off x="9966960" y="1609344"/>
+            <a:ext cx="1508760" cy="658368"/>
+          </a:xfrm>
+          <a:prstGeom prst="rect">
+            <a:avLst/>
+          </a:prstGeom>
+          <a:noFill/>
+        </p:spPr>
+        <p:txBody>
+          <a:bodyPr wrap="square" lIns="0" rIns="0" tIns="0" bIns="0" anchor="ctr">
+            <a:spAutoFit/>
+          </a:bodyPr>
+          <a:lstStyle/>
+          <a:p>
+            <a:pPr algn="l"/>
+            <a:r>
+              <a:rPr sz="2800" b="1" i="0">
+                <a:solidFill>
+                  <a:srgbClr val="1B998B"/>
+                </a:solidFill>
+                <a:latin typeface="Prompt"/>
+                <a:ea typeface="Prompt"/>
+                <a:cs typeface="Prompt"/>
+              </a:rPr>
+              <a:t>~0.5</a:t>
+            </a:r>
+            <a:r>
+              <a:rPr sz="1300" b="0" i="0">
+                <a:solidFill>
+                  <a:srgbClr val="64748B"/>
+                </a:solidFill>
+                <a:latin typeface="Prompt"/>
+                <a:ea typeface="Prompt"/>
+                <a:cs typeface="Prompt"/>
+              </a:rPr>
+              <a:t>  CSI</a:t>
+            </a:r>
+          </a:p>
+        </p:txBody>
+      </p:sp>
+      <p:sp>
+        <p:nvSpPr>
+          <p:cNvPr id="39" name="TextBox 38"/>
+          <p:cNvSpPr txBox="1"/>
+          <p:nvPr/>
+        </p:nvSpPr>
+        <p:spPr>
+          <a:xfrm>
+            <a:off x="9966960" y="2296972"/>
+            <a:ext cx="1508760" cy="658368"/>
+          </a:xfrm>
+          <a:prstGeom prst="rect">
+            <a:avLst/>
+          </a:prstGeom>
+          <a:noFill/>
+        </p:spPr>
+        <p:txBody>
+          <a:bodyPr wrap="square" lIns="0" rIns="0" tIns="0" bIns="0" anchor="t">
+            <a:spAutoFit/>
+          </a:bodyPr>
+          <a:lstStyle/>
+          <a:p>
+            <a:pPr algn="l"/>
+            <a:r>
+              <a:rPr sz="1150" b="0" i="0">
+                <a:solidFill>
+                  <a:srgbClr val="1E293B"/>
+                </a:solidFill>
+                <a:latin typeface="Prompt"/>
+                <a:ea typeface="Prompt"/>
+                <a:cs typeface="Prompt"/>
+              </a:rPr>
+              <a:t>ความแม่นยำเชิงพื้นที่ 3 เหตุการณ์</a:t>
+            </a:r>
+          </a:p>
+        </p:txBody>
+      </p:sp>
+      <p:sp>
+        <p:nvSpPr>
+          <p:cNvPr id="40" name="Rounded Rectangle 39"/>
+          <p:cNvSpPr/>
+          <p:nvPr/>
+        </p:nvSpPr>
+        <p:spPr>
+          <a:xfrm>
+            <a:off x="5760720" y="3108960"/>
+            <a:ext cx="5879592" cy="1600200"/>
+          </a:xfrm>
+          <a:prstGeom prst="roundRect">
+            <a:avLst>
+              <a:gd name="adj" fmla="val 6000"/>
+            </a:avLst>
+          </a:prstGeom>
+          <a:solidFill>
+            <a:srgbClr val="EEF5F9"/>
+          </a:solidFill>
+          <a:ln>
+            <a:noFill/>
+          </a:ln>
+          <a:effectLst/>
+        </p:spPr>
+        <p:style>
+          <a:lnRef idx="1">
+            <a:schemeClr val="accent1"/>
+          </a:lnRef>
+          <a:fillRef idx="3">
+            <a:schemeClr val="accent1"/>
+          </a:fillRef>
+          <a:effectRef idx="2">
+            <a:schemeClr val="accent1"/>
+          </a:effectRef>
+          <a:fontRef idx="minor">
+            <a:schemeClr val="lt1"/>
+          </a:fontRef>
+        </p:style>
+        <p:txBody>
+          <a:bodyPr rtlCol="0" anchor="ctr"/>
+          <a:lstStyle/>
+          <a:p/>
+        </p:txBody>
+      </p:sp>
+      <p:sp>
+        <p:nvSpPr>
+          <p:cNvPr id="41" name="TextBox 40"/>
+          <p:cNvSpPr txBox="1"/>
+          <p:nvPr/>
+        </p:nvSpPr>
+        <p:spPr>
+          <a:xfrm>
+            <a:off x="5961888" y="3218688"/>
+            <a:ext cx="5486400" cy="365760"/>
+          </a:xfrm>
+          <a:prstGeom prst="rect">
+            <a:avLst/>
+          </a:prstGeom>
+          <a:noFill/>
+        </p:spPr>
+        <p:txBody>
+          <a:bodyPr wrap="square" lIns="0" rIns="0" tIns="0" bIns="0" anchor="t">
+            <a:spAutoFit/>
+          </a:bodyPr>
+          <a:lstStyle/>
+          <a:p>
+            <a:pPr algn="l"/>
+            <a:r>
+              <a:rPr sz="1400" b="1" i="0">
+                <a:solidFill>
+                  <a:srgbClr val="0B3C5D"/>
+                </a:solidFill>
+                <a:latin typeface="Prompt"/>
+                <a:ea typeface="Prompt"/>
+                <a:cs typeface="Prompt"/>
+              </a:rPr>
+              <a:t>สิ่งที่ได้จากการวิเคราะห์</a:t>
+            </a:r>
+          </a:p>
+        </p:txBody>
+      </p:sp>
+      <p:sp>
+        <p:nvSpPr>
+          <p:cNvPr id="42" name="TextBox 41"/>
+          <p:cNvSpPr txBox="1"/>
+          <p:nvPr/>
+        </p:nvSpPr>
+        <p:spPr>
+          <a:xfrm>
+            <a:off x="5961888" y="3611880"/>
+            <a:ext cx="5486400" cy="1051560"/>
+          </a:xfrm>
+          <a:prstGeom prst="rect">
+            <a:avLst/>
+          </a:prstGeom>
+          <a:noFill/>
+        </p:spPr>
+        <p:txBody>
+          <a:bodyPr wrap="square" lIns="0" rIns="0" tIns="0" bIns="0" anchor="t">
+            <a:spAutoFit/>
+          </a:bodyPr>
+          <a:lstStyle/>
+          <a:p>
+            <a:pPr algn="l" marL="228600" indent="-228600">
+              <a:buFont typeface="Arial"/>
+              <a:buChar char="•"/>
+            </a:pPr>
+            <a:r>
+              <a:rPr sz="1200" b="0" i="0">
+                <a:solidFill>
+                  <a:srgbClr val="1E293B"/>
+                </a:solidFill>
+                <a:latin typeface="Prompt"/>
+                <a:ea typeface="Prompt"/>
+                <a:cs typeface="Prompt"/>
+              </a:rPr>
+              <a:t>พื้นที่ที่ท่วมซ้ำทุกปีน้ำมาก: ทับกฤช วังมหากร พนมเศษ พระนอน</a:t>
+            </a:r>
+          </a:p>
+          <a:p>
+            <a:pPr algn="l" marL="228600" indent="-228600">
+              <a:spcBef>
+                <a:spcPts val="300"/>
+              </a:spcBef>
+              <a:buFont typeface="Arial"/>
+              <a:buChar char="•"/>
+            </a:pPr>
+            <a:r>
+              <a:rPr sz="1200" b="0" i="0">
+                <a:solidFill>
+                  <a:srgbClr val="1E293B"/>
+                </a:solidFill>
+                <a:latin typeface="Prompt"/>
+                <a:ea typeface="Prompt"/>
+                <a:cs typeface="Prompt"/>
+              </a:rPr>
+              <a:t>จำลองพื้นที่ท่วมนานได้ใกล้ของจริง (ต่างไม่เกิน ~20%)</a:t>
+            </a:r>
+          </a:p>
+        </p:txBody>
+      </p:sp>
+      <p:sp>
+        <p:nvSpPr>
+          <p:cNvPr id="43" name="Rounded Rectangle 42"/>
+          <p:cNvSpPr/>
+          <p:nvPr/>
+        </p:nvSpPr>
+        <p:spPr>
+          <a:xfrm>
+            <a:off x="5760720" y="4846320"/>
+            <a:ext cx="5879592" cy="1417320"/>
+          </a:xfrm>
+          <a:prstGeom prst="roundRect">
+            <a:avLst>
+              <a:gd name="adj" fmla="val 6000"/>
+            </a:avLst>
+          </a:prstGeom>
+          <a:solidFill>
+            <a:srgbClr val="FFF4E5"/>
+          </a:solidFill>
+          <a:ln>
+            <a:noFill/>
+          </a:ln>
+          <a:effectLst/>
+        </p:spPr>
+        <p:style>
+          <a:lnRef idx="1">
+            <a:schemeClr val="accent1"/>
+          </a:lnRef>
+          <a:fillRef idx="3">
+            <a:schemeClr val="accent1"/>
+          </a:fillRef>
+          <a:effectRef idx="2">
+            <a:schemeClr val="accent1"/>
+          </a:effectRef>
+          <a:fontRef idx="minor">
+            <a:schemeClr val="lt1"/>
+          </a:fontRef>
+        </p:style>
+        <p:txBody>
+          <a:bodyPr rtlCol="0" anchor="ctr"/>
+          <a:lstStyle/>
+          <a:p/>
+        </p:txBody>
+      </p:sp>
+      <p:sp>
+        <p:nvSpPr>
+          <p:cNvPr id="44" name="TextBox 43"/>
+          <p:cNvSpPr txBox="1"/>
+          <p:nvPr/>
+        </p:nvSpPr>
+        <p:spPr>
+          <a:xfrm>
+            <a:off x="5961888" y="4937760"/>
+            <a:ext cx="5486400" cy="365760"/>
+          </a:xfrm>
+          <a:prstGeom prst="rect">
+            <a:avLst/>
+          </a:prstGeom>
+          <a:noFill/>
+        </p:spPr>
+        <p:txBody>
+          <a:bodyPr wrap="square" lIns="0" rIns="0" tIns="0" bIns="0" anchor="t">
+            <a:spAutoFit/>
+          </a:bodyPr>
+          <a:lstStyle/>
+          <a:p>
+            <a:pPr algn="l"/>
+            <a:r>
+              <a:rPr sz="1400" b="1" i="0">
+                <a:solidFill>
+                  <a:srgbClr val="0B3C5D"/>
+                </a:solidFill>
+                <a:latin typeface="Prompt"/>
+                <a:ea typeface="Prompt"/>
+                <a:cs typeface="Prompt"/>
+              </a:rPr>
+              <a:t>นัยต่อการบริหารน้ำ</a:t>
+            </a:r>
+          </a:p>
+        </p:txBody>
+      </p:sp>
+      <p:sp>
+        <p:nvSpPr>
+          <p:cNvPr id="45" name="TextBox 44"/>
+          <p:cNvSpPr txBox="1"/>
+          <p:nvPr/>
+        </p:nvSpPr>
+        <p:spPr>
+          <a:xfrm>
+            <a:off x="5961888" y="5321808"/>
+            <a:ext cx="5486400" cy="914400"/>
+          </a:xfrm>
+          <a:prstGeom prst="rect">
+            <a:avLst/>
+          </a:prstGeom>
+          <a:noFill/>
+        </p:spPr>
+        <p:txBody>
+          <a:bodyPr wrap="square" lIns="0" rIns="0" tIns="0" bIns="0" anchor="t">
+            <a:spAutoFit/>
+          </a:bodyPr>
+          <a:lstStyle/>
+          <a:p>
+            <a:pPr algn="l"/>
+            <a:r>
+              <a:rPr sz="1200" b="0" i="0">
+                <a:solidFill>
+                  <a:srgbClr val="1E293B"/>
+                </a:solidFill>
+                <a:latin typeface="Prompt"/>
+                <a:ea typeface="Prompt"/>
+                <a:cs typeface="Prompt"/>
+              </a:rPr>
+              <a:t>ท่วมนานเพราะน้ำจากแม่น้ำเข้าบึงผ่านคลองและประตูน้ำ ก่อนระดับน้ำถึงตลิ่ง → จัดการที่ประตูน้ำ/คลองตรงจุดได้ผลกว่าเฝ้าดูแค่ระดับตลิ่ง</a:t>
+            </a:r>
+          </a:p>
+        </p:txBody>
+      </p:sp>
+      <p:sp>
+        <p:nvSpPr>
+          <p:cNvPr id="46" name="TextBox 45"/>
+          <p:cNvSpPr txBox="1"/>
+          <p:nvPr/>
+        </p:nvSpPr>
+        <p:spPr>
+          <a:xfrm>
+            <a:off x="548640" y="6400800"/>
+            <a:ext cx="10332720" cy="274320"/>
+          </a:xfrm>
+          <a:prstGeom prst="rect">
+            <a:avLst/>
+          </a:prstGeom>
+          <a:noFill/>
+        </p:spPr>
+        <p:txBody>
+          <a:bodyPr wrap="square" lIns="0" rIns="0" tIns="0" bIns="0" anchor="t">
+            <a:spAutoFit/>
+          </a:bodyPr>
+          <a:lstStyle/>
+          <a:p>
+            <a:pPr algn="l"/>
+            <a:r>
+              <a:rPr sz="900" b="0" i="0">
+                <a:solidFill>
+                  <a:srgbClr val="64748B"/>
+                </a:solidFill>
+                <a:latin typeface="Prompt"/>
+                <a:ea typeface="Prompt"/>
+                <a:cs typeface="Prompt"/>
+              </a:rPr>
+              <a:t>Sentinel-1 (Copernicus) ผ่าน Microsoft Planetary Computer · ระดับน้ำจริง ThaiWater (สสน.) · ฝน ERA5 · CSI = พื้นที่ตรงกัน ÷ (ตรงกัน + ขาด + เกิน)</a:t>
+            </a:r>
+          </a:p>
+        </p:txBody>
+      </p:sp>
+    </p:spTree>
+  </p:cSld>
+  <p:clrMapOvr>
+    <a:masterClrMapping/>
+  </p:clrMapOvr>
+</p:sld>
+</file>
+
+<file path=ppt/slides/slide8.xml><?xml version="1.0" encoding="utf-8"?>
 <p:sld xmlns:a="http://schemas.openxmlformats.org/drawingml/2006/main" xmlns:r="http://schemas.openxmlformats.org/officeDocument/2006/relationships" xmlns:p="http://schemas.openxmlformats.org/presentationml/2006/main">
   <p:cSld name="Slide 7">
     <p:bg>
@@ -11036,6 +12932,10 @@
             <a:prstDash val="solid"/>
           </a:ln>
         </p:spPr>
+        <p:txBody>
+          <a:bodyPr/>
+          <a:p/>
+        </p:txBody>
       </p:sp>
       <p:sp>
         <p:nvSpPr>
@@ -11147,6 +13047,10 @@
             <a:prstDash val="solid"/>
           </a:ln>
         </p:spPr>
+        <p:txBody>
+          <a:bodyPr/>
+          <a:p/>
+        </p:txBody>
       </p:sp>
       <p:sp>
         <p:nvSpPr>
@@ -11258,6 +13162,10 @@
             <a:prstDash val="solid"/>
           </a:ln>
         </p:spPr>
+        <p:txBody>
+          <a:bodyPr/>
+          <a:p/>
+        </p:txBody>
       </p:sp>
       <p:sp>
         <p:nvSpPr>
@@ -11369,6 +13277,10 @@
             <a:prstDash val="solid"/>
           </a:ln>
         </p:spPr>
+        <p:txBody>
+          <a:bodyPr/>
+          <a:p/>
+        </p:txBody>
       </p:sp>
       <p:sp>
         <p:nvSpPr>
@@ -11480,6 +13392,10 @@
             <a:prstDash val="solid"/>
           </a:ln>
         </p:spPr>
+        <p:txBody>
+          <a:bodyPr/>
+          <a:p/>
+        </p:txBody>
       </p:sp>
       <p:sp>
         <p:nvSpPr>
@@ -11591,6 +13507,10 @@
             <a:prstDash val="solid"/>
           </a:ln>
         </p:spPr>
+        <p:txBody>
+          <a:bodyPr/>
+          <a:p/>
+        </p:txBody>
       </p:sp>
       <p:sp>
         <p:nvSpPr>
@@ -11732,7 +13652,7 @@
 </p:sld>
 </file>
 
-<file path=ppt/slides/slide8.xml><?xml version="1.0" encoding="utf-8"?>
+<file path=ppt/slides/slide9.xml><?xml version="1.0" encoding="utf-8"?>
 <p:sld xmlns:a="http://schemas.openxmlformats.org/drawingml/2006/main" xmlns:r="http://schemas.openxmlformats.org/officeDocument/2006/relationships" xmlns:p="http://schemas.openxmlformats.org/presentationml/2006/main">
   <p:cSld name="Slide 8">
     <p:bg>
@@ -11883,6 +13803,10 @@
             <a:prstDash val="solid"/>
           </a:ln>
         </p:spPr>
+        <p:txBody>
+          <a:bodyPr/>
+          <a:p/>
+        </p:txBody>
       </p:sp>
       <p:sp>
         <p:nvSpPr>
@@ -11966,6 +13890,10 @@
             <a:prstDash val="solid"/>
           </a:ln>
         </p:spPr>
+        <p:txBody>
+          <a:bodyPr/>
+          <a:p/>
+        </p:txBody>
       </p:sp>
       <p:sp>
         <p:nvSpPr>
@@ -12049,6 +13977,10 @@
             <a:prstDash val="solid"/>
           </a:ln>
         </p:spPr>
+        <p:txBody>
+          <a:bodyPr/>
+          <a:p/>
+        </p:txBody>
       </p:sp>
       <p:sp>
         <p:nvSpPr>
@@ -12149,788 +14081,6 @@
             <a:fld id="{F7021451-1387-4CA6-816F-3879F97B5CBC}" type="slidenum">
               <a:rPr b="0" lang="en-US"/>
               <a:t>8</a:t>
-            </a:fld>
-            <a:endParaRPr lang="en-US"/>
-          </a:p>
-        </p:txBody>
-      </p:sp>
-    </p:spTree>
-  </p:cSld>
-  <p:clrMapOvr>
-    <a:masterClrMapping/>
-  </p:clrMapOvr>
-</p:sld>
-</file>
-
-<file path=ppt/slides/slide9.xml><?xml version="1.0" encoding="utf-8"?>
-<p:sld xmlns:a="http://schemas.openxmlformats.org/drawingml/2006/main" xmlns:r="http://schemas.openxmlformats.org/officeDocument/2006/relationships" xmlns:p="http://schemas.openxmlformats.org/presentationml/2006/main">
-  <p:cSld name="Slide 9">
-    <p:bg>
-      <p:bgPr>
-        <a:solidFill>
-          <a:srgbClr val="FFFFFF"/>
-        </a:solidFill>
-      </p:bgPr>
-    </p:bg>
-    <p:spTree>
-      <p:nvGrpSpPr>
-        <p:cNvPr id="1" name=""/>
-        <p:cNvGrpSpPr/>
-        <p:nvPr/>
-      </p:nvGrpSpPr>
-      <p:grpSpPr>
-        <a:xfrm>
-          <a:off x="0" y="0"/>
-          <a:ext cx="0" cy="0"/>
-          <a:chOff x="0" y="0"/>
-          <a:chExt cx="0" cy="0"/>
-        </a:xfrm>
-      </p:grpSpPr>
-      <p:sp>
-        <p:nvSpPr>
-          <p:cNvPr id="2" name="Text 0"/>
-          <p:cNvSpPr txBox="1"/>
-          <p:nvPr/>
-        </p:nvSpPr>
-        <p:spPr>
-          <a:xfrm>
-            <a:off x="548640" y="347472"/>
-            <a:ext cx="8229600" cy="274320"/>
-          </a:xfrm>
-          <a:prstGeom prst="rect">
-            <a:avLst/>
-          </a:prstGeom>
-          <a:noFill/>
-          <a:ln/>
-        </p:spPr>
-        <p:txBody>
-          <a:bodyPr wrap="square" lIns="0" tIns="0" rIns="0" bIns="0" rtlCol="0" anchor="t"/>
-          <a:lstStyle/>
-          <a:p>
-            <a:pPr indent="0" marL="0">
-              <a:buNone/>
-            </a:pPr>
-            <a:r>
-              <a:rPr lang="en-US" sz="1200" b="1" spc="100" kern="0" dirty="0">
-                <a:solidFill>
-                  <a:srgbClr val="1B998B"/>
-                </a:solidFill>
-                <a:latin typeface="Prompt" pitchFamily="34" charset="0"/>
-                <a:ea typeface="Prompt" pitchFamily="34" charset="-122"/>
-                <a:cs typeface="Prompt" pitchFamily="34" charset="-120"/>
-              </a:rPr>
-              <a:t>การนำไปใช้</a:t>
-            </a:r>
-            <a:endParaRPr lang="en-US" sz="1200" dirty="0"/>
-          </a:p>
-        </p:txBody>
-      </p:sp>
-      <p:sp>
-        <p:nvSpPr>
-          <p:cNvPr id="3" name="Text 1"/>
-          <p:cNvSpPr txBox="1"/>
-          <p:nvPr/>
-        </p:nvSpPr>
-        <p:spPr>
-          <a:xfrm>
-            <a:off x="548640" y="621792"/>
-            <a:ext cx="11094415" cy="685800"/>
-          </a:xfrm>
-          <a:prstGeom prst="rect">
-            <a:avLst/>
-          </a:prstGeom>
-          <a:noFill/>
-          <a:ln/>
-        </p:spPr>
-        <p:txBody>
-          <a:bodyPr wrap="square" lIns="0" tIns="0" rIns="0" bIns="0" rtlCol="0" anchor="ctr"/>
-          <a:lstStyle/>
-          <a:p>
-            <a:pPr indent="0" marL="0">
-              <a:buNone/>
-            </a:pPr>
-            <a:r>
-              <a:rPr lang="en-US" sz="2800" b="1" dirty="0">
-                <a:solidFill>
-                  <a:srgbClr val="0B3C5D"/>
-                </a:solidFill>
-                <a:latin typeface="Prompt" pitchFamily="34" charset="0"/>
-                <a:ea typeface="Prompt" pitchFamily="34" charset="-122"/>
-                <a:cs typeface="Prompt" pitchFamily="34" charset="-120"/>
-              </a:rPr>
-              <a:t>ทางเลือกการติดตั้งใช้งาน</a:t>
-            </a:r>
-            <a:endParaRPr lang="en-US" sz="2800" dirty="0"/>
-          </a:p>
-        </p:txBody>
-      </p:sp>
-      <p:sp>
-        <p:nvSpPr>
-          <p:cNvPr id="4" name="Shape 2"/>
-          <p:cNvSpPr/>
-          <p:nvPr/>
-        </p:nvSpPr>
-        <p:spPr>
-          <a:xfrm>
-            <a:off x="548640" y="1600200"/>
-            <a:ext cx="3547872" cy="3566160"/>
-          </a:xfrm>
-          <a:prstGeom prst="roundRect">
-            <a:avLst>
-              <a:gd name="adj" fmla="val 2577"/>
-            </a:avLst>
-          </a:prstGeom>
-          <a:solidFill>
-            <a:srgbClr val="EEF5F9"/>
-          </a:solidFill>
-          <a:ln w="9525">
-            <a:solidFill>
-              <a:srgbClr val="EEF5F9"/>
-            </a:solidFill>
-            <a:prstDash val="solid"/>
-          </a:ln>
-        </p:spPr>
-      </p:sp>
-      <p:sp>
-        <p:nvSpPr>
-          <p:cNvPr id="5" name="Text 3"/>
-          <p:cNvSpPr txBox="1"/>
-          <p:nvPr/>
-        </p:nvSpPr>
-        <p:spPr>
-          <a:xfrm>
-            <a:off x="749808" y="1764792"/>
-            <a:ext cx="3163824" cy="420624"/>
-          </a:xfrm>
-          <a:prstGeom prst="rect">
-            <a:avLst/>
-          </a:prstGeom>
-          <a:noFill/>
-          <a:ln/>
-        </p:spPr>
-        <p:txBody>
-          <a:bodyPr wrap="square" lIns="0" tIns="0" rIns="0" bIns="0" rtlCol="0" anchor="ctr"/>
-          <a:lstStyle/>
-          <a:p>
-            <a:pPr indent="0" marL="0">
-              <a:buNone/>
-            </a:pPr>
-            <a:r>
-              <a:rPr lang="en-US" sz="1700" b="1" dirty="0">
-                <a:solidFill>
-                  <a:srgbClr val="1B998B"/>
-                </a:solidFill>
-                <a:latin typeface="Prompt" pitchFamily="34" charset="0"/>
-                <a:ea typeface="Prompt" pitchFamily="34" charset="-122"/>
-                <a:cs typeface="Prompt" pitchFamily="34" charset="-120"/>
-              </a:rPr>
-              <a:t>A · เว็บสาธารณะต้นทุนต่ำ</a:t>
-            </a:r>
-            <a:endParaRPr lang="en-US" sz="1700" dirty="0"/>
-          </a:p>
-        </p:txBody>
-      </p:sp>
-      <p:sp>
-        <p:nvSpPr>
-          <p:cNvPr id="6" name="Text 4"/>
-          <p:cNvSpPr txBox="1"/>
-          <p:nvPr/>
-        </p:nvSpPr>
-        <p:spPr>
-          <a:xfrm>
-            <a:off x="749808" y="2295144"/>
-            <a:ext cx="3145536" cy="2734056"/>
-          </a:xfrm>
-          <a:prstGeom prst="rect">
-            <a:avLst/>
-          </a:prstGeom>
-          <a:noFill/>
-          <a:ln/>
-        </p:spPr>
-        <p:txBody>
-          <a:bodyPr wrap="square" lIns="0" tIns="0" rIns="0" bIns="0" rtlCol="0" anchor="t"/>
-          <a:lstStyle/>
-          <a:p>
-            <a:pPr marL="177800" indent="-177800">
-              <a:lnSpc>
-                <a:spcPct val="105000"/>
-              </a:lnSpc>
-              <a:spcAft>
-                <a:spcPts val="400"/>
-              </a:spcAft>
-              <a:buSzPct val="100000"/>
-              <a:buChar char="•"/>
-            </a:pPr>
-            <a:r>
-              <a:rPr lang="en-US" sz="1550" dirty="0">
-                <a:solidFill>
-                  <a:srgbClr val="1E293B"/>
-                </a:solidFill>
-                <a:latin typeface="Prompt" pitchFamily="34" charset="0"/>
-                <a:ea typeface="Prompt" pitchFamily="34" charset="-122"/>
-                <a:cs typeface="Prompt" pitchFamily="34" charset="-120"/>
-              </a:rPr>
-              <a:t>GitHub Pages + GitHub Actions</a:t>
-            </a:r>
-            <a:endParaRPr lang="en-US" sz="1550" dirty="0"/>
-          </a:p>
-          <a:p>
-            <a:pPr marL="177800" indent="-177800">
-              <a:lnSpc>
-                <a:spcPct val="105000"/>
-              </a:lnSpc>
-              <a:spcAft>
-                <a:spcPts val="400"/>
-              </a:spcAft>
-              <a:buSzPct val="100000"/>
-              <a:buChar char="•"/>
-            </a:pPr>
-            <a:r>
-              <a:rPr lang="en-US" sz="1550" dirty="0">
-                <a:solidFill>
-                  <a:srgbClr val="1E293B"/>
-                </a:solidFill>
-                <a:latin typeface="Prompt" pitchFamily="34" charset="0"/>
-                <a:ea typeface="Prompt" pitchFamily="34" charset="-122"/>
-                <a:cs typeface="Prompt" pitchFamily="34" charset="-120"/>
-              </a:rPr>
-              <a:t>ไม่มีค่าเซิร์ฟเวอร์ ไม่ต้องใช้ ArcGIS Online</a:t>
-            </a:r>
-            <a:endParaRPr lang="en-US" sz="1550" dirty="0"/>
-          </a:p>
-          <a:p>
-            <a:pPr marL="177800" indent="-177800">
-              <a:lnSpc>
-                <a:spcPct val="105000"/>
-              </a:lnSpc>
-              <a:spcAft>
-                <a:spcPts val="400"/>
-              </a:spcAft>
-              <a:buSzPct val="100000"/>
-              <a:buChar char="•"/>
-            </a:pPr>
-            <a:r>
-              <a:rPr lang="en-US" sz="1550" dirty="0">
-                <a:solidFill>
-                  <a:srgbClr val="1E293B"/>
-                </a:solidFill>
-                <a:latin typeface="Prompt" pitchFamily="34" charset="0"/>
-                <a:ea typeface="Prompt" pitchFamily="34" charset="-122"/>
-                <a:cs typeface="Prompt" pitchFamily="34" charset="-120"/>
-              </a:rPr>
-              <a:t>เหมาะกับการเผยแพร่ข้อมูลให้ประชาชน</a:t>
-            </a:r>
-            <a:endParaRPr lang="en-US" sz="1550" dirty="0"/>
-          </a:p>
-          <a:p>
-            <a:pPr marL="177800" indent="-177800">
-              <a:lnSpc>
-                <a:spcPct val="105000"/>
-              </a:lnSpc>
-              <a:spcAft>
-                <a:spcPts val="400"/>
-              </a:spcAft>
-              <a:buSzPct val="100000"/>
-              <a:buChar char="•"/>
-            </a:pPr>
-            <a:r>
-              <a:rPr lang="en-US" sz="1550" dirty="0">
-                <a:solidFill>
-                  <a:srgbClr val="1E293B"/>
-                </a:solidFill>
-                <a:latin typeface="Prompt" pitchFamily="34" charset="0"/>
-                <a:ea typeface="Prompt" pitchFamily="34" charset="-122"/>
-                <a:cs typeface="Prompt" pitchFamily="34" charset="-120"/>
-              </a:rPr>
-              <a:t>ต้องตรวจว่าดึงข้อมูล ThaiWater จากต่างประเทศได้</a:t>
-            </a:r>
-            <a:endParaRPr lang="en-US" sz="1550" dirty="0"/>
-          </a:p>
-        </p:txBody>
-      </p:sp>
-      <p:sp>
-        <p:nvSpPr>
-          <p:cNvPr id="7" name="Shape 5"/>
-          <p:cNvSpPr/>
-          <p:nvPr/>
-        </p:nvSpPr>
-        <p:spPr>
-          <a:xfrm>
-            <a:off x="4279392" y="1600200"/>
-            <a:ext cx="3547872" cy="3566160"/>
-          </a:xfrm>
-          <a:prstGeom prst="roundRect">
-            <a:avLst>
-              <a:gd name="adj" fmla="val 2577"/>
-            </a:avLst>
-          </a:prstGeom>
-          <a:solidFill>
-            <a:srgbClr val="EEF5F9"/>
-          </a:solidFill>
-          <a:ln w="9525">
-            <a:solidFill>
-              <a:srgbClr val="EEF5F9"/>
-            </a:solidFill>
-            <a:prstDash val="solid"/>
-          </a:ln>
-        </p:spPr>
-      </p:sp>
-      <p:sp>
-        <p:nvSpPr>
-          <p:cNvPr id="8" name="Text 6"/>
-          <p:cNvSpPr txBox="1"/>
-          <p:nvPr/>
-        </p:nvSpPr>
-        <p:spPr>
-          <a:xfrm>
-            <a:off x="4480560" y="1764792"/>
-            <a:ext cx="3163824" cy="420624"/>
-          </a:xfrm>
-          <a:prstGeom prst="rect">
-            <a:avLst/>
-          </a:prstGeom>
-          <a:noFill/>
-          <a:ln/>
-        </p:spPr>
-        <p:txBody>
-          <a:bodyPr wrap="square" lIns="0" tIns="0" rIns="0" bIns="0" rtlCol="0" anchor="ctr"/>
-          <a:lstStyle/>
-          <a:p>
-            <a:pPr indent="0" marL="0">
-              <a:buNone/>
-            </a:pPr>
-            <a:r>
-              <a:rPr lang="en-US" sz="1700" b="1" dirty="0">
-                <a:solidFill>
-                  <a:srgbClr val="0B3C5D"/>
-                </a:solidFill>
-                <a:latin typeface="Prompt" pitchFamily="34" charset="0"/>
-                <a:ea typeface="Prompt" pitchFamily="34" charset="-122"/>
-                <a:cs typeface="Prompt" pitchFamily="34" charset="-120"/>
-              </a:rPr>
-              <a:t>B · ArcGIS Online / Enterprise</a:t>
-            </a:r>
-            <a:endParaRPr lang="en-US" sz="1700" dirty="0"/>
-          </a:p>
-        </p:txBody>
-      </p:sp>
-      <p:sp>
-        <p:nvSpPr>
-          <p:cNvPr id="9" name="Text 7"/>
-          <p:cNvSpPr txBox="1"/>
-          <p:nvPr/>
-        </p:nvSpPr>
-        <p:spPr>
-          <a:xfrm>
-            <a:off x="4480560" y="2295144"/>
-            <a:ext cx="3145536" cy="2734056"/>
-          </a:xfrm>
-          <a:prstGeom prst="rect">
-            <a:avLst/>
-          </a:prstGeom>
-          <a:noFill/>
-          <a:ln/>
-        </p:spPr>
-        <p:txBody>
-          <a:bodyPr wrap="square" lIns="0" tIns="0" rIns="0" bIns="0" rtlCol="0" anchor="t"/>
-          <a:lstStyle/>
-          <a:p>
-            <a:pPr marL="177800" indent="-177800">
-              <a:lnSpc>
-                <a:spcPct val="105000"/>
-              </a:lnSpc>
-              <a:spcAft>
-                <a:spcPts val="400"/>
-              </a:spcAft>
-              <a:buSzPct val="100000"/>
-              <a:buChar char="•"/>
-            </a:pPr>
-            <a:r>
-              <a:rPr lang="en-US" sz="1550" dirty="0">
-                <a:solidFill>
-                  <a:srgbClr val="1E293B"/>
-                </a:solidFill>
-                <a:latin typeface="Prompt" pitchFamily="34" charset="0"/>
-                <a:ea typeface="Prompt" pitchFamily="34" charset="-122"/>
-                <a:cs typeface="Prompt" pitchFamily="34" charset="-120"/>
-              </a:rPr>
-              <a:t>publish ผลเป็น hosted feature layer</a:t>
-            </a:r>
-            <a:endParaRPr lang="en-US" sz="1550" dirty="0"/>
-          </a:p>
-          <a:p>
-            <a:pPr marL="177800" indent="-177800">
-              <a:lnSpc>
-                <a:spcPct val="105000"/>
-              </a:lnSpc>
-              <a:spcAft>
-                <a:spcPts val="400"/>
-              </a:spcAft>
-              <a:buSzPct val="100000"/>
-              <a:buChar char="•"/>
-            </a:pPr>
-            <a:r>
-              <a:rPr lang="en-US" sz="1550" dirty="0">
-                <a:solidFill>
-                  <a:srgbClr val="1E293B"/>
-                </a:solidFill>
-                <a:latin typeface="Prompt" pitchFamily="34" charset="0"/>
-                <a:ea typeface="Prompt" pitchFamily="34" charset="-122"/>
-                <a:cs typeface="Prompt" pitchFamily="34" charset="-120"/>
-              </a:rPr>
-              <a:t>Dashboards / Experience Builder สำหรับศูนย์บัญชาการ</a:t>
-            </a:r>
-            <a:endParaRPr lang="en-US" sz="1550" dirty="0"/>
-          </a:p>
-          <a:p>
-            <a:pPr marL="177800" indent="-177800">
-              <a:lnSpc>
-                <a:spcPct val="105000"/>
-              </a:lnSpc>
-              <a:spcAft>
-                <a:spcPts val="400"/>
-              </a:spcAft>
-              <a:buSzPct val="100000"/>
-              <a:buChar char="•"/>
-            </a:pPr>
-            <a:r>
-              <a:rPr lang="en-US" sz="1550" dirty="0">
-                <a:solidFill>
-                  <a:srgbClr val="1E293B"/>
-                </a:solidFill>
-                <a:latin typeface="Prompt" pitchFamily="34" charset="0"/>
-                <a:ea typeface="Prompt" pitchFamily="34" charset="-122"/>
-                <a:cs typeface="Prompt" pitchFamily="34" charset="-120"/>
-              </a:rPr>
-              <a:t>จัดสิทธิ์ผู้ใช้ภายในหน่วยงาน</a:t>
-            </a:r>
-            <a:endParaRPr lang="en-US" sz="1550" dirty="0"/>
-          </a:p>
-          <a:p>
-            <a:pPr marL="177800" indent="-177800">
-              <a:lnSpc>
-                <a:spcPct val="105000"/>
-              </a:lnSpc>
-              <a:spcAft>
-                <a:spcPts val="400"/>
-              </a:spcAft>
-              <a:buSzPct val="100000"/>
-              <a:buChar char="•"/>
-            </a:pPr>
-            <a:r>
-              <a:rPr lang="en-US" sz="1550" dirty="0">
-                <a:solidFill>
-                  <a:srgbClr val="1E293B"/>
-                </a:solidFill>
-                <a:latin typeface="Prompt" pitchFamily="34" charset="0"/>
-                <a:ea typeface="Prompt" pitchFamily="34" charset="-122"/>
-                <a:cs typeface="Prompt" pitchFamily="34" charset="-120"/>
-              </a:rPr>
-              <a:t>ใช้ pipeline เดิม เพิ่มขั้นส่งข้อมูล</a:t>
-            </a:r>
-            <a:endParaRPr lang="en-US" sz="1550" dirty="0"/>
-          </a:p>
-        </p:txBody>
-      </p:sp>
-      <p:sp>
-        <p:nvSpPr>
-          <p:cNvPr id="10" name="Shape 8"/>
-          <p:cNvSpPr/>
-          <p:nvPr/>
-        </p:nvSpPr>
-        <p:spPr>
-          <a:xfrm>
-            <a:off x="8010144" y="1600200"/>
-            <a:ext cx="3547872" cy="3566160"/>
-          </a:xfrm>
-          <a:prstGeom prst="roundRect">
-            <a:avLst>
-              <a:gd name="adj" fmla="val 2577"/>
-            </a:avLst>
-          </a:prstGeom>
-          <a:solidFill>
-            <a:srgbClr val="EEF5F9"/>
-          </a:solidFill>
-          <a:ln w="9525">
-            <a:solidFill>
-              <a:srgbClr val="EEF5F9"/>
-            </a:solidFill>
-            <a:prstDash val="solid"/>
-          </a:ln>
-        </p:spPr>
-      </p:sp>
-      <p:sp>
-        <p:nvSpPr>
-          <p:cNvPr id="11" name="Text 9"/>
-          <p:cNvSpPr txBox="1"/>
-          <p:nvPr/>
-        </p:nvSpPr>
-        <p:spPr>
-          <a:xfrm>
-            <a:off x="8211312" y="1764792"/>
-            <a:ext cx="3163824" cy="420624"/>
-          </a:xfrm>
-          <a:prstGeom prst="rect">
-            <a:avLst/>
-          </a:prstGeom>
-          <a:noFill/>
-          <a:ln/>
-        </p:spPr>
-        <p:txBody>
-          <a:bodyPr wrap="square" lIns="0" tIns="0" rIns="0" bIns="0" rtlCol="0" anchor="ctr"/>
-          <a:lstStyle/>
-          <a:p>
-            <a:pPr indent="0" marL="0">
-              <a:buNone/>
-            </a:pPr>
-            <a:r>
-              <a:rPr lang="en-US" sz="1700" b="1" dirty="0">
-                <a:solidFill>
-                  <a:srgbClr val="F2A541"/>
-                </a:solidFill>
-                <a:latin typeface="Prompt" pitchFamily="34" charset="0"/>
-                <a:ea typeface="Prompt" pitchFamily="34" charset="-122"/>
-                <a:cs typeface="Prompt" pitchFamily="34" charset="-120"/>
-              </a:rPr>
-              <a:t>C · ติดตั้งในหน่วยงาน</a:t>
-            </a:r>
-            <a:endParaRPr lang="en-US" sz="1700" dirty="0"/>
-          </a:p>
-        </p:txBody>
-      </p:sp>
-      <p:sp>
-        <p:nvSpPr>
-          <p:cNvPr id="12" name="Text 10"/>
-          <p:cNvSpPr txBox="1"/>
-          <p:nvPr/>
-        </p:nvSpPr>
-        <p:spPr>
-          <a:xfrm>
-            <a:off x="8211312" y="2295144"/>
-            <a:ext cx="3145536" cy="2734056"/>
-          </a:xfrm>
-          <a:prstGeom prst="rect">
-            <a:avLst/>
-          </a:prstGeom>
-          <a:noFill/>
-          <a:ln/>
-        </p:spPr>
-        <p:txBody>
-          <a:bodyPr wrap="square" lIns="0" tIns="0" rIns="0" bIns="0" rtlCol="0" anchor="t"/>
-          <a:lstStyle/>
-          <a:p>
-            <a:pPr marL="177800" indent="-177800">
-              <a:lnSpc>
-                <a:spcPct val="105000"/>
-              </a:lnSpc>
-              <a:spcAft>
-                <a:spcPts val="400"/>
-              </a:spcAft>
-              <a:buSzPct val="100000"/>
-              <a:buChar char="•"/>
-            </a:pPr>
-            <a:r>
-              <a:rPr lang="en-US" sz="1550" dirty="0">
-                <a:solidFill>
-                  <a:srgbClr val="1E293B"/>
-                </a:solidFill>
-                <a:latin typeface="Prompt" pitchFamily="34" charset="0"/>
-                <a:ea typeface="Prompt" pitchFamily="34" charset="-122"/>
-                <a:cs typeface="Prompt" pitchFamily="34" charset="-120"/>
-              </a:rPr>
-              <a:t>รันบนเครื่องที่มี ArcGIS Pro (toolbox พร้อมใช้)</a:t>
-            </a:r>
-            <a:endParaRPr lang="en-US" sz="1550" dirty="0"/>
-          </a:p>
-          <a:p>
-            <a:pPr marL="177800" indent="-177800">
-              <a:lnSpc>
-                <a:spcPct val="105000"/>
-              </a:lnSpc>
-              <a:spcAft>
-                <a:spcPts val="400"/>
-              </a:spcAft>
-              <a:buSzPct val="100000"/>
-              <a:buChar char="•"/>
-            </a:pPr>
-            <a:r>
-              <a:rPr lang="en-US" sz="1550" dirty="0">
-                <a:solidFill>
-                  <a:srgbClr val="1E293B"/>
-                </a:solidFill>
-                <a:latin typeface="Prompt" pitchFamily="34" charset="0"/>
-                <a:ea typeface="Prompt" pitchFamily="34" charset="-122"/>
-                <a:cs typeface="Prompt" pitchFamily="34" charset="-120"/>
-              </a:rPr>
-              <a:t>self-hosted runner ในเครือข่ายหน่วยงาน</a:t>
-            </a:r>
-            <a:endParaRPr lang="en-US" sz="1550" dirty="0"/>
-          </a:p>
-          <a:p>
-            <a:pPr marL="177800" indent="-177800">
-              <a:lnSpc>
-                <a:spcPct val="105000"/>
-              </a:lnSpc>
-              <a:spcAft>
-                <a:spcPts val="400"/>
-              </a:spcAft>
-              <a:buSzPct val="100000"/>
-              <a:buChar char="•"/>
-            </a:pPr>
-            <a:r>
-              <a:rPr lang="en-US" sz="1550" dirty="0">
-                <a:solidFill>
-                  <a:srgbClr val="1E293B"/>
-                </a:solidFill>
-                <a:latin typeface="Prompt" pitchFamily="34" charset="0"/>
-                <a:ea typeface="Prompt" pitchFamily="34" charset="-122"/>
-                <a:cs typeface="Prompt" pitchFamily="34" charset="-120"/>
-              </a:rPr>
-              <a:t>เชื่อมข้อมูลภายใน เช่น สถานีสูบ ประตูน้ำ</a:t>
-            </a:r>
-            <a:endParaRPr lang="en-US" sz="1550" dirty="0"/>
-          </a:p>
-          <a:p>
-            <a:pPr marL="177800" indent="-177800">
-              <a:lnSpc>
-                <a:spcPct val="105000"/>
-              </a:lnSpc>
-              <a:spcAft>
-                <a:spcPts val="400"/>
-              </a:spcAft>
-              <a:buSzPct val="100000"/>
-              <a:buChar char="•"/>
-            </a:pPr>
-            <a:r>
-              <a:rPr lang="en-US" sz="1550" dirty="0">
-                <a:solidFill>
-                  <a:srgbClr val="1E293B"/>
-                </a:solidFill>
-                <a:latin typeface="Prompt" pitchFamily="34" charset="0"/>
-                <a:ea typeface="Prompt" pitchFamily="34" charset="-122"/>
-                <a:cs typeface="Prompt" pitchFamily="34" charset="-120"/>
-              </a:rPr>
-              <a:t>เหมาะกับข้อมูลที่ไม่เปิดเผย</a:t>
-            </a:r>
-            <a:endParaRPr lang="en-US" sz="1550" dirty="0"/>
-          </a:p>
-        </p:txBody>
-      </p:sp>
-      <p:sp>
-        <p:nvSpPr>
-          <p:cNvPr id="13" name="Shape 11"/>
-          <p:cNvSpPr/>
-          <p:nvPr/>
-        </p:nvSpPr>
-        <p:spPr>
-          <a:xfrm>
-            <a:off x="548640" y="5394960"/>
-            <a:ext cx="11094415" cy="777240"/>
-          </a:xfrm>
-          <a:prstGeom prst="roundRect">
-            <a:avLst>
-              <a:gd name="adj" fmla="val 11765"/>
-            </a:avLst>
-          </a:prstGeom>
-          <a:solidFill>
-            <a:srgbClr val="E3F1EE"/>
-          </a:solidFill>
-          <a:ln w="9525">
-            <a:solidFill>
-              <a:srgbClr val="E3F1EE"/>
-            </a:solidFill>
-            <a:prstDash val="solid"/>
-          </a:ln>
-        </p:spPr>
-      </p:sp>
-      <p:sp>
-        <p:nvSpPr>
-          <p:cNvPr id="14" name="Text 12"/>
-          <p:cNvSpPr txBox="1"/>
-          <p:nvPr/>
-        </p:nvSpPr>
-        <p:spPr>
-          <a:xfrm>
-            <a:off x="749808" y="5577840"/>
-            <a:ext cx="10692079" cy="457200"/>
-          </a:xfrm>
-          <a:prstGeom prst="rect">
-            <a:avLst/>
-          </a:prstGeom>
-          <a:noFill/>
-          <a:ln/>
-        </p:spPr>
-        <p:txBody>
-          <a:bodyPr wrap="square" lIns="0" tIns="0" rIns="0" bIns="0" rtlCol="0" anchor="t"/>
-          <a:lstStyle/>
-          <a:p>
-            <a:pPr indent="0" marL="0">
-              <a:lnSpc>
-                <a:spcPct val="105000"/>
-              </a:lnSpc>
-              <a:spcAft>
-                <a:spcPts val="400"/>
-              </a:spcAft>
-              <a:buNone/>
-            </a:pPr>
-            <a:r>
-              <a:rPr lang="en-US" sz="1500" dirty="0">
-                <a:solidFill>
-                  <a:srgbClr val="1E293B"/>
-                </a:solidFill>
-                <a:latin typeface="Prompt" pitchFamily="34" charset="0"/>
-                <a:ea typeface="Prompt" pitchFamily="34" charset="-122"/>
-                <a:cs typeface="Prompt" pitchFamily="34" charset="-120"/>
-              </a:rPr>
-              <a:t>ทุกทางเลือกใช้ชุดเครื่องมือ ArcGIS Pro และแบบจำลองเดียวกัน ต่างกันที่ที่เก็บผลลัพธ์และผู้ที่เข้าถึงได้</a:t>
-            </a:r>
-            <a:endParaRPr lang="en-US" sz="1500" dirty="0"/>
-          </a:p>
-        </p:txBody>
-      </p:sp>
-      <p:sp>
-        <p:nvSpPr>
-          <p:cNvPr id="25" name="Slide Number Placeholder 0"/>
-          <p:cNvSpPr>
-            <a:spLocks noGrp="1"/>
-          </p:cNvSpPr>
-          <p:nvPr>
-            <p:ph type="sldNum" sz="quarter" idx="4294967295"/>
-          </p:nvPr>
-        </p:nvSpPr>
-        <p:spPr>
-          <a:xfrm>
-            <a:off x="11277295" y="6419088"/>
-            <a:ext cx="457200" cy="274320"/>
-          </a:xfrm>
-          <a:prstGeom prst="rect">
-            <a:avLst/>
-          </a:prstGeom>
-          <a:extLst>
-            <a:ext uri="{C572A759-6A51-4108-AA02-DFA0A04FC94B}">
-              <ma14:wrappingTextBoxFlag xmlns:ma14="http://schemas.microsoft.com/office/mac/drawingml/2011/main" val="0"/>
-            </a:ext>
-          </a:extLst>
-        </p:spPr>
-        <p:txBody>
-          <a:bodyPr/>
-          <a:lstStyle>
-            <a:lvl1pPr>
-              <a:defRPr sz="900">
-                <a:solidFill>
-                  <a:srgbClr val="64748B"/>
-                </a:solidFill>
-                <a:latin typeface="Prompt"/>
-                <a:ea typeface="Prompt"/>
-                <a:cs typeface="Prompt"/>
-              </a:defRPr>
-            </a:lvl1pPr>
-          </a:lstStyle>
-          <a:p>
-            <a:pPr algn="r"/>
-            <a:fld id="{F7021451-1387-4CA6-816F-3879F97B5CBC}" type="slidenum">
-              <a:rPr b="0" lang="en-US"/>
-              <a:t>9</a:t>
             </a:fld>
             <a:endParaRPr lang="en-US"/>
           </a:p>
